--- a/Grammar_Mastery/05_Adverbs/GM-ADV-03_Prepositional_Phrases.pptx
+++ b/Grammar_Mastery/05_Adverbs/GM-ADV-03_Prepositional_Phrases.pptx
@@ -531,7 +531,11 @@
           <a:lstStyle/>
           <a:p>
             <a:r>
-              <a:rPr lang="en-US" dirty="0"/>
+              <a:rPr lang="ar-SA" dirty="0">
+                <a:latin typeface="Amiri" pitchFamily="2" charset="-78"/>
+                <a:ea typeface="Amiri" pitchFamily="2" charset="-78"/>
+                <a:cs typeface="Amiri" pitchFamily="2" charset="-78"/>
+              </a:rPr>
               <a:t>LESSON AT A GLANCE — planned for 56 minutes, leaving about 4 minutes for Teams delays.
 0–1 Welcome · 1–2 Lesson map · 2–9 Do Now + answers · 9–10 Objectives · 10–13 Grammar words · 13–24 The grammar, step by step · 24–26 Quick check · 26–29 I Do · 29–38 We Do (sort, repair, practise) · 38–49 You Do (read, speak, write on your route) · 49–54 Feedback (model, self-check, exit ticket) · 54–56 Preparation.
 FLEX slides are optional: use them if the class is moving quickly; otherwise the same activities are on the website for homework.
@@ -897,7 +901,11 @@
           <a:lstStyle/>
           <a:p>
             <a:r>
-              <a:rPr lang="en-US" dirty="0"/>
+              <a:rPr lang="ar-SA" dirty="0">
+                <a:latin typeface="Amiri" pitchFamily="2" charset="-78"/>
+                <a:ea typeface="Amiri" pitchFamily="2" charset="-78"/>
+                <a:cs typeface="Amiri" pitchFamily="2" charset="-78"/>
+              </a:rPr>
               <a:t>I DO (3 min) — think aloud at every step: name the rule in English and Arabic as you apply it.
 Website layering model plus a means phrase (بِالْحَافِلَةِ). Ask: “Is ‘by bus’ the same kind of information as ‘quickly’?” — means vs manner.</a:t>
             </a:r>
@@ -1521,7 +1529,11 @@
           <a:lstStyle/>
           <a:p>
             <a:r>
-              <a:rPr lang="en-US" dirty="0"/>
+              <a:rPr lang="ar-SA" dirty="0">
+                <a:latin typeface="Amiri" pitchFamily="2" charset="-78"/>
+                <a:ea typeface="Amiri" pitchFamily="2" charset="-78"/>
+                <a:cs typeface="Amiri" pitchFamily="2" charset="-78"/>
+              </a:rPr>
               <a:t>WELCOME (1 min) — while students join.
 • Greet each student by name as they arrive: السَّلَامُ عَلَيْكُمْ. Take the register (Pastoral Tracker: attendance 0/1).
 • 2-MINUTE CHECK-IN (SEND training): a private chat to any student who seemed unsettled last lesson — “Are you okay today? 👍 / 👎”.
@@ -3317,7 +3329,11 @@
           <a:lstStyle/>
           <a:p>
             <a:r>
-              <a:rPr lang="en-US" dirty="0"/>
+              <a:rPr lang="ar-SA" dirty="0">
+                <a:latin typeface="Amiri" pitchFamily="2" charset="-78"/>
+                <a:ea typeface="Amiri" pitchFamily="2" charset="-78"/>
+                <a:cs typeface="Amiri" pitchFamily="2" charset="-78"/>
+              </a:rPr>
               <a:t>PART 1 (4 min) — website table “bi- + noun: expressing manner”. Teach each chunk with a gesture; chant noun → phrase: سُرْعَةٌ → بِسُرْعَةٍ.</a:t>
             </a:r>
             <a:endParaRPr lang="en-US" dirty="0"/>
@@ -3405,7 +3421,11 @@
           <a:lstStyle/>
           <a:p>
             <a:r>
-              <a:rPr lang="en-US" dirty="0"/>
+              <a:rPr lang="ar-SA" dirty="0">
+                <a:latin typeface="Amiri" pitchFamily="2" charset="-78"/>
+                <a:ea typeface="Amiri" pitchFamily="2" charset="-78"/>
+                <a:cs typeface="Amiri" pitchFamily="2" charset="-78"/>
+              </a:rPr>
               <a:t>PART 2 (3 min) — the website “transformation drill” words (سَرِيعٌ، سَهْلٌ، وَاضِحٌ، هَادِئٌ، آمِنٌ) as a teaching table.</a:t>
             </a:r>
             <a:endParaRPr lang="en-US" dirty="0"/>
@@ -3889,6 +3909,7 @@
                   <a:srgbClr val="D4AF37"/>
                 </a:solidFill>
                 <a:latin typeface="Amiri" pitchFamily="2" charset="-78"/>
+                <a:ea typeface="Amiri" pitchFamily="2" charset="-78"/>
                 <a:cs typeface="Amiri" pitchFamily="2" charset="-78"/>
               </a:rPr>
               <a:t>م</a:t>
@@ -4095,6 +4116,7 @@
                   <a:srgbClr val="D4AF37"/>
                 </a:solidFill>
                 <a:latin typeface="Amiri" pitchFamily="2" charset="-78"/>
+                <a:ea typeface="Amiri" pitchFamily="2" charset="-78"/>
                 <a:cs typeface="Amiri" pitchFamily="2" charset="-78"/>
               </a:rPr>
               <a:t>التَّرَاكِيبُ الظَّرْفِيَّةُ بِالْجَارِّ وَالْمَجْرُورِ</a:t>
@@ -4552,6 +4574,7 @@
                   <a:srgbClr val="D4AF37"/>
                 </a:solidFill>
                 <a:latin typeface="Amiri" pitchFamily="2" charset="-78"/>
+                <a:ea typeface="Amiri" pitchFamily="2" charset="-78"/>
                 <a:cs typeface="Amiri" pitchFamily="2" charset="-78"/>
               </a:rPr>
               <a:t>م</a:t>
@@ -4872,6 +4895,7 @@
                   <a:srgbClr val="8A6D1E"/>
                 </a:solidFill>
                 <a:latin typeface="Amiri" pitchFamily="2" charset="-78"/>
+                <a:ea typeface="Amiri" pitchFamily="2" charset="-78"/>
                 <a:cs typeface="Amiri" pitchFamily="2" charset="-78"/>
               </a:rPr>
               <a:t>فِي + اسْمٍ وَالتَّرْتِيبُ</a:t>
@@ -5597,6 +5621,7 @@
                   <a:srgbClr val="1B3B6F"/>
                 </a:solidFill>
                 <a:latin typeface="Amiri" pitchFamily="2" charset="-78"/>
+                <a:ea typeface="Amiri" pitchFamily="2" charset="-78"/>
                 <a:cs typeface="Amiri" pitchFamily="2" charset="-78"/>
               </a:rPr>
               <a:t>فِي الْبَيْتِ · فِي الْخَارِجِ</a:t>
@@ -5696,6 +5721,7 @@
                   <a:srgbClr val="1B3B6F"/>
                 </a:solidFill>
                 <a:latin typeface="Amiri" pitchFamily="2" charset="-78"/>
+                <a:ea typeface="Amiri" pitchFamily="2" charset="-78"/>
                 <a:cs typeface="Amiri" pitchFamily="2" charset="-78"/>
               </a:rPr>
               <a:t>فِي الصَّبَاحِ · فِي الشِّتَاءِ</a:t>
@@ -5795,6 +5821,7 @@
                   <a:srgbClr val="1B3B6F"/>
                 </a:solidFill>
                 <a:latin typeface="Amiri" pitchFamily="2" charset="-78"/>
+                <a:ea typeface="Amiri" pitchFamily="2" charset="-78"/>
                 <a:cs typeface="Amiri" pitchFamily="2" charset="-78"/>
               </a:rPr>
               <a:t>قَرَأْتُ النَّصَّ بِعِنَايَةٍ.</a:t>
@@ -5894,6 +5921,7 @@
                   <a:srgbClr val="1B3B6F"/>
                 </a:solidFill>
                 <a:latin typeface="Amiri" pitchFamily="2" charset="-78"/>
+                <a:ea typeface="Amiri" pitchFamily="2" charset="-78"/>
                 <a:cs typeface="Amiri" pitchFamily="2" charset="-78"/>
               </a:rPr>
               <a:t>أَكْمَلْتُ الْوَاجِبَ بِسُرْعَةٍ فِي الْمَكْتَبَةِ أَمْسِ.</a:t>
@@ -6175,6 +6203,7 @@
                   <a:srgbClr val="D4AF37"/>
                 </a:solidFill>
                 <a:latin typeface="Amiri" pitchFamily="2" charset="-78"/>
+                <a:ea typeface="Amiri" pitchFamily="2" charset="-78"/>
                 <a:cs typeface="Amiri" pitchFamily="2" charset="-78"/>
               </a:rPr>
               <a:t>م</a:t>
@@ -6495,6 +6524,7 @@
                   <a:srgbClr val="8A6D1E"/>
                 </a:solidFill>
                 <a:latin typeface="Amiri" pitchFamily="2" charset="-78"/>
+                <a:ea typeface="Amiri" pitchFamily="2" charset="-78"/>
                 <a:cs typeface="Amiri" pitchFamily="2" charset="-78"/>
               </a:rPr>
               <a:t>فَحْصٌ سَرِيعٌ</a:t>
@@ -6769,6 +6799,7 @@
                   <a:srgbClr val="1F2A37"/>
                 </a:solidFill>
                 <a:latin typeface="Amiri" pitchFamily="2" charset="-78"/>
+                <a:ea typeface="Amiri" pitchFamily="2" charset="-78"/>
                 <a:cs typeface="Amiri" pitchFamily="2" charset="-78"/>
               </a:rPr>
               <a:t>عِنَايَةٌ</a:t>
@@ -6870,6 +6901,7 @@
                   <a:srgbClr val="1F2A37"/>
                 </a:solidFill>
                 <a:latin typeface="Amiri" pitchFamily="2" charset="-78"/>
+                <a:ea typeface="Amiri" pitchFamily="2" charset="-78"/>
                 <a:cs typeface="Amiri" pitchFamily="2" charset="-78"/>
               </a:rPr>
               <a:t>بِعِنَايَةُ</a:t>
@@ -6971,6 +7003,7 @@
                   <a:srgbClr val="1F2A37"/>
                 </a:solidFill>
                 <a:latin typeface="Amiri" pitchFamily="2" charset="-78"/>
+                <a:ea typeface="Amiri" pitchFamily="2" charset="-78"/>
                 <a:cs typeface="Amiri" pitchFamily="2" charset="-78"/>
               </a:rPr>
               <a:t>بِعِنَايَةٍ</a:t>
@@ -7207,6 +7240,7 @@
                   <a:srgbClr val="1F2A37"/>
                 </a:solidFill>
                 <a:latin typeface="Amiri" pitchFamily="2" charset="-78"/>
+                <a:ea typeface="Amiri" pitchFamily="2" charset="-78"/>
                 <a:cs typeface="Amiri" pitchFamily="2" charset="-78"/>
               </a:rPr>
               <a:t>أَجَابَ الطَّالِبُ بِهُدُوءٍ.</a:t>
@@ -7308,6 +7342,7 @@
                   <a:srgbClr val="1F2A37"/>
                 </a:solidFill>
                 <a:latin typeface="Amiri" pitchFamily="2" charset="-78"/>
+                <a:ea typeface="Amiri" pitchFamily="2" charset="-78"/>
                 <a:cs typeface="Amiri" pitchFamily="2" charset="-78"/>
               </a:rPr>
               <a:t>أَجَابَ الطَّالِبُ هَادِئٌ.</a:t>
@@ -7409,6 +7444,7 @@
                   <a:srgbClr val="1F2A37"/>
                 </a:solidFill>
                 <a:latin typeface="Amiri" pitchFamily="2" charset="-78"/>
+                <a:ea typeface="Amiri" pitchFamily="2" charset="-78"/>
                 <a:cs typeface="Amiri" pitchFamily="2" charset="-78"/>
               </a:rPr>
               <a:t>أَجَابَ الطَّالِبُ فِي هَادِئٍ.</a:t>
@@ -7645,6 +7681,7 @@
                   <a:srgbClr val="1F2A37"/>
                 </a:solidFill>
                 <a:latin typeface="Amiri" pitchFamily="2" charset="-78"/>
+                <a:ea typeface="Amiri" pitchFamily="2" charset="-78"/>
                 <a:cs typeface="Amiri" pitchFamily="2" charset="-78"/>
               </a:rPr>
               <a:t>بِالصَّبَاحُ</a:t>
@@ -7746,6 +7783,7 @@
                   <a:srgbClr val="1F2A37"/>
                 </a:solidFill>
                 <a:latin typeface="Amiri" pitchFamily="2" charset="-78"/>
+                <a:ea typeface="Amiri" pitchFamily="2" charset="-78"/>
                 <a:cs typeface="Amiri" pitchFamily="2" charset="-78"/>
               </a:rPr>
               <a:t>فِي الصَّبَاحِ</a:t>
@@ -7847,6 +7885,7 @@
                   <a:srgbClr val="1F2A37"/>
                 </a:solidFill>
                 <a:latin typeface="Amiri" pitchFamily="2" charset="-78"/>
+                <a:ea typeface="Amiri" pitchFamily="2" charset="-78"/>
                 <a:cs typeface="Amiri" pitchFamily="2" charset="-78"/>
               </a:rPr>
               <a:t>الصَّبَاحَ فِي</a:t>
@@ -8083,6 +8122,7 @@
                   <a:srgbClr val="1F2A37"/>
                 </a:solidFill>
                 <a:latin typeface="Amiri" pitchFamily="2" charset="-78"/>
+                <a:ea typeface="Amiri" pitchFamily="2" charset="-78"/>
                 <a:cs typeface="Amiri" pitchFamily="2" charset="-78"/>
               </a:rPr>
               <a:t>فِي الْمَسَاءِ</a:t>
@@ -8184,6 +8224,7 @@
                   <a:srgbClr val="1F2A37"/>
                 </a:solidFill>
                 <a:latin typeface="Amiri" pitchFamily="2" charset="-78"/>
+                <a:ea typeface="Amiri" pitchFamily="2" charset="-78"/>
                 <a:cs typeface="Amiri" pitchFamily="2" charset="-78"/>
               </a:rPr>
               <a:t>فِي الْمَكْتَبَةِ</a:t>
@@ -8285,6 +8326,7 @@
                   <a:srgbClr val="1F2A37"/>
                 </a:solidFill>
                 <a:latin typeface="Amiri" pitchFamily="2" charset="-78"/>
+                <a:ea typeface="Amiri" pitchFamily="2" charset="-78"/>
                 <a:cs typeface="Amiri" pitchFamily="2" charset="-78"/>
               </a:rPr>
               <a:t>فِي الْحَدِيقَةِ</a:t>
@@ -8418,6 +8460,7 @@
                   <a:srgbClr val="D4AF37"/>
                 </a:solidFill>
                 <a:latin typeface="Amiri" pitchFamily="2" charset="-78"/>
+                <a:ea typeface="Amiri" pitchFamily="2" charset="-78"/>
                 <a:cs typeface="Amiri" pitchFamily="2" charset="-78"/>
               </a:rPr>
               <a:t>م</a:t>
@@ -8738,6 +8781,7 @@
                   <a:srgbClr val="8A6D1E"/>
                 </a:solidFill>
                 <a:latin typeface="Amiri" pitchFamily="2" charset="-78"/>
+                <a:ea typeface="Amiri" pitchFamily="2" charset="-78"/>
                 <a:cs typeface="Amiri" pitchFamily="2" charset="-78"/>
               </a:rPr>
               <a:t>الإِجَابَاتُ وَالتَّعْلِيلُ</a:t>
@@ -9012,6 +9056,7 @@
                   <a:srgbClr val="9AA1AB"/>
                 </a:solidFill>
                 <a:latin typeface="Amiri" pitchFamily="2" charset="-78"/>
+                <a:ea typeface="Amiri" pitchFamily="2" charset="-78"/>
                 <a:cs typeface="Amiri" pitchFamily="2" charset="-78"/>
               </a:rPr>
               <a:t>عِنَايَةٌ</a:t>
@@ -9113,6 +9158,7 @@
                   <a:srgbClr val="9AA1AB"/>
                 </a:solidFill>
                 <a:latin typeface="Amiri" pitchFamily="2" charset="-78"/>
+                <a:ea typeface="Amiri" pitchFamily="2" charset="-78"/>
                 <a:cs typeface="Amiri" pitchFamily="2" charset="-78"/>
               </a:rPr>
               <a:t>بِعِنَايَةُ</a:t>
@@ -9241,6 +9287,7 @@
                   <a:srgbClr val="1F2A37"/>
                 </a:solidFill>
                 <a:latin typeface="Amiri" pitchFamily="2" charset="-78"/>
+                <a:ea typeface="Amiri" pitchFamily="2" charset="-78"/>
                 <a:cs typeface="Amiri" pitchFamily="2" charset="-78"/>
               </a:rPr>
               <a:t>بِعِنَايَةٍ</a:t>
@@ -9542,6 +9589,7 @@
                   <a:srgbClr val="1F2A37"/>
                 </a:solidFill>
                 <a:latin typeface="Amiri" pitchFamily="2" charset="-78"/>
+                <a:ea typeface="Amiri" pitchFamily="2" charset="-78"/>
                 <a:cs typeface="Amiri" pitchFamily="2" charset="-78"/>
               </a:rPr>
               <a:t>أَجَابَ الطَّالِبُ بِهُدُوءٍ.</a:t>
@@ -9643,6 +9691,7 @@
                   <a:srgbClr val="9AA1AB"/>
                 </a:solidFill>
                 <a:latin typeface="Amiri" pitchFamily="2" charset="-78"/>
+                <a:ea typeface="Amiri" pitchFamily="2" charset="-78"/>
                 <a:cs typeface="Amiri" pitchFamily="2" charset="-78"/>
               </a:rPr>
               <a:t>أَجَابَ الطَّالِبُ هَادِئٌ.</a:t>
@@ -9744,6 +9793,7 @@
                   <a:srgbClr val="9AA1AB"/>
                 </a:solidFill>
                 <a:latin typeface="Amiri" pitchFamily="2" charset="-78"/>
+                <a:ea typeface="Amiri" pitchFamily="2" charset="-78"/>
                 <a:cs typeface="Amiri" pitchFamily="2" charset="-78"/>
               </a:rPr>
               <a:t>أَجَابَ الطَّالِبُ فِي هَادِئٍ.</a:t>
@@ -10018,6 +10068,7 @@
                   <a:srgbClr val="9AA1AB"/>
                 </a:solidFill>
                 <a:latin typeface="Amiri" pitchFamily="2" charset="-78"/>
+                <a:ea typeface="Amiri" pitchFamily="2" charset="-78"/>
                 <a:cs typeface="Amiri" pitchFamily="2" charset="-78"/>
               </a:rPr>
               <a:t>بِالصَّبَاحُ</a:t>
@@ -10146,6 +10197,7 @@
                   <a:srgbClr val="1F2A37"/>
                 </a:solidFill>
                 <a:latin typeface="Amiri" pitchFamily="2" charset="-78"/>
+                <a:ea typeface="Amiri" pitchFamily="2" charset="-78"/>
                 <a:cs typeface="Amiri" pitchFamily="2" charset="-78"/>
               </a:rPr>
               <a:t>فِي الصَّبَاحِ</a:t>
@@ -10247,6 +10299,7 @@
                   <a:srgbClr val="9AA1AB"/>
                 </a:solidFill>
                 <a:latin typeface="Amiri" pitchFamily="2" charset="-78"/>
+                <a:ea typeface="Amiri" pitchFamily="2" charset="-78"/>
                 <a:cs typeface="Amiri" pitchFamily="2" charset="-78"/>
               </a:rPr>
               <a:t>الصَّبَاحَ فِي</a:t>
@@ -10548,6 +10601,7 @@
                   <a:srgbClr val="1F2A37"/>
                 </a:solidFill>
                 <a:latin typeface="Amiri" pitchFamily="2" charset="-78"/>
+                <a:ea typeface="Amiri" pitchFamily="2" charset="-78"/>
                 <a:cs typeface="Amiri" pitchFamily="2" charset="-78"/>
               </a:rPr>
               <a:t>فِي الْمَسَاءِ</a:t>
@@ -10649,6 +10703,7 @@
                   <a:srgbClr val="9AA1AB"/>
                 </a:solidFill>
                 <a:latin typeface="Amiri" pitchFamily="2" charset="-78"/>
+                <a:ea typeface="Amiri" pitchFamily="2" charset="-78"/>
                 <a:cs typeface="Amiri" pitchFamily="2" charset="-78"/>
               </a:rPr>
               <a:t>فِي الْمَكْتَبَةِ</a:t>
@@ -10750,6 +10805,7 @@
                   <a:srgbClr val="9AA1AB"/>
                 </a:solidFill>
                 <a:latin typeface="Amiri" pitchFamily="2" charset="-78"/>
+                <a:ea typeface="Amiri" pitchFamily="2" charset="-78"/>
                 <a:cs typeface="Amiri" pitchFamily="2" charset="-78"/>
               </a:rPr>
               <a:t>فِي الْحَدِيقَةِ</a:t>
@@ -10921,6 +10977,7 @@
                   <a:srgbClr val="D4AF37"/>
                 </a:solidFill>
                 <a:latin typeface="Amiri" pitchFamily="2" charset="-78"/>
+                <a:ea typeface="Amiri" pitchFamily="2" charset="-78"/>
                 <a:cs typeface="Amiri" pitchFamily="2" charset="-78"/>
               </a:rPr>
               <a:t>م</a:t>
@@ -11241,6 +11298,7 @@
                   <a:srgbClr val="8A6D1E"/>
                 </a:solidFill>
                 <a:latin typeface="Amiri" pitchFamily="2" charset="-78"/>
+                <a:ea typeface="Amiri" pitchFamily="2" charset="-78"/>
                 <a:cs typeface="Amiri" pitchFamily="2" charset="-78"/>
               </a:rPr>
               <a:t>شَاهِدْ ثُمَّ اُكْتُبْ</a:t>
@@ -11452,6 +11510,7 @@
                   <a:srgbClr val="1B3B6F"/>
                 </a:solidFill>
                 <a:latin typeface="Amiri" pitchFamily="2" charset="-78"/>
+                <a:ea typeface="Amiri" pitchFamily="2" charset="-78"/>
                 <a:cs typeface="Amiri" pitchFamily="2" charset="-78"/>
               </a:rPr>
               <a:t>أَكْمَلْتُ الْوَاجِبَ</a:t>
@@ -11701,6 +11760,7 @@
                   <a:srgbClr val="1B3B6F"/>
                 </a:solidFill>
                 <a:latin typeface="Amiri" pitchFamily="2" charset="-78"/>
+                <a:ea typeface="Amiri" pitchFamily="2" charset="-78"/>
                 <a:cs typeface="Amiri" pitchFamily="2" charset="-78"/>
               </a:rPr>
               <a:t>بِسُرْعَةٍ</a:t>
@@ -11950,6 +12010,7 @@
                   <a:srgbClr val="1B3B6F"/>
                 </a:solidFill>
                 <a:latin typeface="Amiri" pitchFamily="2" charset="-78"/>
+                <a:ea typeface="Amiri" pitchFamily="2" charset="-78"/>
                 <a:cs typeface="Amiri" pitchFamily="2" charset="-78"/>
               </a:rPr>
               <a:t>فِي الْمَكْتَبَةِ</a:t>
@@ -12199,6 +12260,7 @@
                   <a:srgbClr val="1B3B6F"/>
                 </a:solidFill>
                 <a:latin typeface="Amiri" pitchFamily="2" charset="-78"/>
+                <a:ea typeface="Amiri" pitchFamily="2" charset="-78"/>
                 <a:cs typeface="Amiri" pitchFamily="2" charset="-78"/>
               </a:rPr>
               <a:t>أَمْسِ</a:t>
@@ -12501,6 +12563,7 @@
                   <a:srgbClr val="1B3B6F"/>
                 </a:solidFill>
                 <a:latin typeface="Amiri" pitchFamily="2" charset="-78"/>
+                <a:ea typeface="Amiri" pitchFamily="2" charset="-78"/>
                 <a:cs typeface="Amiri" pitchFamily="2" charset="-78"/>
               </a:rPr>
               <a:t>أَكْمَلْتُ الْوَاجِبَ </a:t>
@@ -12514,6 +12577,7 @@
                   <a:srgbClr val="0E7C86"/>
                 </a:solidFill>
                 <a:latin typeface="Amiri" pitchFamily="2" charset="-78"/>
+                <a:ea typeface="Amiri" pitchFamily="2" charset="-78"/>
                 <a:cs typeface="Amiri" pitchFamily="2" charset="-78"/>
               </a:rPr>
               <a:t>بِسُرْعَةٍ</a:t>
@@ -12540,6 +12604,7 @@
                   <a:srgbClr val="D6336C"/>
                 </a:solidFill>
                 <a:latin typeface="Amiri" pitchFamily="2" charset="-78"/>
+                <a:ea typeface="Amiri" pitchFamily="2" charset="-78"/>
                 <a:cs typeface="Amiri" pitchFamily="2" charset="-78"/>
               </a:rPr>
               <a:t>فِي الْمَكْتَبَةِ</a:t>
@@ -12553,6 +12618,7 @@
                   <a:srgbClr val="1B3B6F"/>
                 </a:solidFill>
                 <a:latin typeface="Amiri" pitchFamily="2" charset="-78"/>
+                <a:ea typeface="Amiri" pitchFamily="2" charset="-78"/>
                 <a:cs typeface="Amiri" pitchFamily="2" charset="-78"/>
               </a:rPr>
               <a:t> أَمْسِ، ثُمَّ رَجَعْتُ </a:t>
@@ -12566,6 +12632,7 @@
                   <a:srgbClr val="0E7C86"/>
                 </a:solidFill>
                 <a:latin typeface="Amiri" pitchFamily="2" charset="-78"/>
+                <a:ea typeface="Amiri" pitchFamily="2" charset="-78"/>
                 <a:cs typeface="Amiri" pitchFamily="2" charset="-78"/>
               </a:rPr>
               <a:t>بِالْحَافِلَةِ</a:t>
@@ -12579,6 +12646,7 @@
                   <a:srgbClr val="1B3B6F"/>
                 </a:solidFill>
                 <a:latin typeface="Amiri" pitchFamily="2" charset="-78"/>
+                <a:ea typeface="Amiri" pitchFamily="2" charset="-78"/>
                 <a:cs typeface="Amiri" pitchFamily="2" charset="-78"/>
               </a:rPr>
               <a:t> وَوَصَلْتُ </a:t>
@@ -12592,6 +12660,7 @@
                   <a:srgbClr val="0E7C86"/>
                 </a:solidFill>
                 <a:latin typeface="Amiri" pitchFamily="2" charset="-78"/>
+                <a:ea typeface="Amiri" pitchFamily="2" charset="-78"/>
                 <a:cs typeface="Amiri" pitchFamily="2" charset="-78"/>
               </a:rPr>
               <a:t>بِأَمَانٍ</a:t>
@@ -12776,6 +12845,7 @@
                   <a:srgbClr val="D4AF37"/>
                 </a:solidFill>
                 <a:latin typeface="Amiri" pitchFamily="2" charset="-78"/>
+                <a:ea typeface="Amiri" pitchFamily="2" charset="-78"/>
                 <a:cs typeface="Amiri" pitchFamily="2" charset="-78"/>
               </a:rPr>
               <a:t>م</a:t>
@@ -13096,6 +13166,7 @@
                   <a:srgbClr val="8A6D1E"/>
                 </a:solidFill>
                 <a:latin typeface="Amiri" pitchFamily="2" charset="-78"/>
+                <a:ea typeface="Amiri" pitchFamily="2" charset="-78"/>
                 <a:cs typeface="Amiri" pitchFamily="2" charset="-78"/>
               </a:rPr>
               <a:t>جُمَلٌ نَمُوذَجِيَّةٌ</a:t>
@@ -13269,6 +13340,7 @@
                   <a:srgbClr val="1B3B6F"/>
                 </a:solidFill>
                 <a:latin typeface="Amiri" pitchFamily="2" charset="-78"/>
+                <a:ea typeface="Amiri" pitchFamily="2" charset="-78"/>
                 <a:cs typeface="Amiri" pitchFamily="2" charset="-78"/>
               </a:rPr>
               <a:t>فَهِمْتُ الدَّرْسَ بِسُهُولَةٍ.</a:t>
@@ -13458,6 +13530,7 @@
                   <a:srgbClr val="1B3B6F"/>
                 </a:solidFill>
                 <a:latin typeface="Amiri" pitchFamily="2" charset="-78"/>
+                <a:ea typeface="Amiri" pitchFamily="2" charset="-78"/>
                 <a:cs typeface="Amiri" pitchFamily="2" charset="-78"/>
               </a:rPr>
               <a:t>فِي الْمَسَاءِ أَدْرُسُ فِي غُرْفَتِي.</a:t>
@@ -13647,6 +13720,7 @@
                   <a:srgbClr val="1B3B6F"/>
                 </a:solidFill>
                 <a:latin typeface="Amiri" pitchFamily="2" charset="-78"/>
+                <a:ea typeface="Amiri" pitchFamily="2" charset="-78"/>
                 <a:cs typeface="Amiri" pitchFamily="2" charset="-78"/>
               </a:rPr>
               <a:t>أَكْتُبُ إِجَابَاتِي بِوُضُوحٍ.</a:t>
@@ -13836,6 +13910,7 @@
                   <a:srgbClr val="1B3B6F"/>
                 </a:solidFill>
                 <a:latin typeface="Amiri" pitchFamily="2" charset="-78"/>
+                <a:ea typeface="Amiri" pitchFamily="2" charset="-78"/>
                 <a:cs typeface="Amiri" pitchFamily="2" charset="-78"/>
               </a:rPr>
               <a:t>ذَهَبْتُ إِلَى الْمَدْرَسَةِ بِالْحَافِلَةِ.</a:t>
@@ -14023,6 +14098,7 @@
                   <a:srgbClr val="D4AF37"/>
                 </a:solidFill>
                 <a:latin typeface="Amiri" pitchFamily="2" charset="-78"/>
+                <a:ea typeface="Amiri" pitchFamily="2" charset="-78"/>
                 <a:cs typeface="Amiri" pitchFamily="2" charset="-78"/>
               </a:rPr>
               <a:t>م</a:t>
@@ -14343,6 +14419,7 @@
                   <a:srgbClr val="8A6D1E"/>
                 </a:solidFill>
                 <a:latin typeface="Amiri" pitchFamily="2" charset="-78"/>
+                <a:ea typeface="Amiri" pitchFamily="2" charset="-78"/>
                 <a:cs typeface="Amiri" pitchFamily="2" charset="-78"/>
               </a:rPr>
               <a:t>كَيْفَ؟ أَيْنَ؟ مَتَى؟ بِمَاذَا؟</a:t>
@@ -14453,6 +14530,7 @@
                   <a:srgbClr val="1B3B6F"/>
                 </a:solidFill>
                 <a:latin typeface="Amiri" pitchFamily="2" charset="-78"/>
+                <a:ea typeface="Amiri" pitchFamily="2" charset="-78"/>
                 <a:cs typeface="Amiri" pitchFamily="2" charset="-78"/>
               </a:rPr>
               <a:t>بِعِنَايَةٍ</a:t>
@@ -14525,6 +14603,7 @@
                   <a:srgbClr val="1B3B6F"/>
                 </a:solidFill>
                 <a:latin typeface="Amiri" pitchFamily="2" charset="-78"/>
+                <a:ea typeface="Amiri" pitchFamily="2" charset="-78"/>
                 <a:cs typeface="Amiri" pitchFamily="2" charset="-78"/>
               </a:rPr>
               <a:t>فِي السُّوقِ</a:t>
@@ -14597,6 +14676,7 @@
                   <a:srgbClr val="1B3B6F"/>
                 </a:solidFill>
                 <a:latin typeface="Amiri" pitchFamily="2" charset="-78"/>
+                <a:ea typeface="Amiri" pitchFamily="2" charset="-78"/>
                 <a:cs typeface="Amiri" pitchFamily="2" charset="-78"/>
               </a:rPr>
               <a:t>فِي اللَّيْلِ</a:t>
@@ -14669,6 +14749,7 @@
                   <a:srgbClr val="1B3B6F"/>
                 </a:solidFill>
                 <a:latin typeface="Amiri" pitchFamily="2" charset="-78"/>
+                <a:ea typeface="Amiri" pitchFamily="2" charset="-78"/>
                 <a:cs typeface="Amiri" pitchFamily="2" charset="-78"/>
               </a:rPr>
               <a:t>بِالْقِطَارِ</a:t>
@@ -14741,6 +14822,7 @@
                   <a:srgbClr val="1B3B6F"/>
                 </a:solidFill>
                 <a:latin typeface="Amiri" pitchFamily="2" charset="-78"/>
+                <a:ea typeface="Amiri" pitchFamily="2" charset="-78"/>
                 <a:cs typeface="Amiri" pitchFamily="2" charset="-78"/>
               </a:rPr>
               <a:t>بِبُطْءٍ</a:t>
@@ -14813,6 +14895,7 @@
                   <a:srgbClr val="1B3B6F"/>
                 </a:solidFill>
                 <a:latin typeface="Amiri" pitchFamily="2" charset="-78"/>
+                <a:ea typeface="Amiri" pitchFamily="2" charset="-78"/>
                 <a:cs typeface="Amiri" pitchFamily="2" charset="-78"/>
               </a:rPr>
               <a:t>فِي الْخَارِجِ</a:t>
@@ -14885,6 +14968,7 @@
                   <a:srgbClr val="1B3B6F"/>
                 </a:solidFill>
                 <a:latin typeface="Amiri" pitchFamily="2" charset="-78"/>
+                <a:ea typeface="Amiri" pitchFamily="2" charset="-78"/>
                 <a:cs typeface="Amiri" pitchFamily="2" charset="-78"/>
               </a:rPr>
               <a:t>فِي الشِّتَاءِ</a:t>
@@ -14957,6 +15041,7 @@
                   <a:srgbClr val="1B3B6F"/>
                 </a:solidFill>
                 <a:latin typeface="Amiri" pitchFamily="2" charset="-78"/>
+                <a:ea typeface="Amiri" pitchFamily="2" charset="-78"/>
                 <a:cs typeface="Amiri" pitchFamily="2" charset="-78"/>
               </a:rPr>
               <a:t>بِالسَّيَّارَةِ</a:t>
@@ -15458,6 +15543,7 @@
                   <a:srgbClr val="D4AF37"/>
                 </a:solidFill>
                 <a:latin typeface="Amiri" pitchFamily="2" charset="-78"/>
+                <a:ea typeface="Amiri" pitchFamily="2" charset="-78"/>
                 <a:cs typeface="Amiri" pitchFamily="2" charset="-78"/>
               </a:rPr>
               <a:t>م</a:t>
@@ -15778,6 +15864,7 @@
                   <a:srgbClr val="8A6D1E"/>
                 </a:solidFill>
                 <a:latin typeface="Amiri" pitchFamily="2" charset="-78"/>
+                <a:ea typeface="Amiri" pitchFamily="2" charset="-78"/>
                 <a:cs typeface="Amiri" pitchFamily="2" charset="-78"/>
               </a:rPr>
               <a:t>الإِجَابَاتُ</a:t>
@@ -15973,6 +16060,7 @@
                   <a:srgbClr val="1B3B6F"/>
                 </a:solidFill>
                 <a:latin typeface="Amiri" pitchFamily="2" charset="-78"/>
+                <a:ea typeface="Amiri" pitchFamily="2" charset="-78"/>
                 <a:cs typeface="Amiri" pitchFamily="2" charset="-78"/>
               </a:rPr>
               <a:t>بِعِنَايَةٍ</a:t>
@@ -16038,6 +16126,7 @@
                   <a:srgbClr val="1B3B6F"/>
                 </a:solidFill>
                 <a:latin typeface="Amiri" pitchFamily="2" charset="-78"/>
+                <a:ea typeface="Amiri" pitchFamily="2" charset="-78"/>
                 <a:cs typeface="Amiri" pitchFamily="2" charset="-78"/>
               </a:rPr>
               <a:t>بِبُطْءٍ</a:t>
@@ -16195,6 +16284,7 @@
                   <a:srgbClr val="1B3B6F"/>
                 </a:solidFill>
                 <a:latin typeface="Amiri" pitchFamily="2" charset="-78"/>
+                <a:ea typeface="Amiri" pitchFamily="2" charset="-78"/>
                 <a:cs typeface="Amiri" pitchFamily="2" charset="-78"/>
               </a:rPr>
               <a:t>فِي السُّوقِ</a:t>
@@ -16260,6 +16350,7 @@
                   <a:srgbClr val="1B3B6F"/>
                 </a:solidFill>
                 <a:latin typeface="Amiri" pitchFamily="2" charset="-78"/>
+                <a:ea typeface="Amiri" pitchFamily="2" charset="-78"/>
                 <a:cs typeface="Amiri" pitchFamily="2" charset="-78"/>
               </a:rPr>
               <a:t>فِي الْخَارِجِ</a:t>
@@ -16417,6 +16508,7 @@
                   <a:srgbClr val="1B3B6F"/>
                 </a:solidFill>
                 <a:latin typeface="Amiri" pitchFamily="2" charset="-78"/>
+                <a:ea typeface="Amiri" pitchFamily="2" charset="-78"/>
                 <a:cs typeface="Amiri" pitchFamily="2" charset="-78"/>
               </a:rPr>
               <a:t>فِي اللَّيْلِ</a:t>
@@ -16482,6 +16574,7 @@
                   <a:srgbClr val="1B3B6F"/>
                 </a:solidFill>
                 <a:latin typeface="Amiri" pitchFamily="2" charset="-78"/>
+                <a:ea typeface="Amiri" pitchFamily="2" charset="-78"/>
                 <a:cs typeface="Amiri" pitchFamily="2" charset="-78"/>
               </a:rPr>
               <a:t>فِي الشِّتَاءِ</a:t>
@@ -16639,6 +16732,7 @@
                   <a:srgbClr val="1B3B6F"/>
                 </a:solidFill>
                 <a:latin typeface="Amiri" pitchFamily="2" charset="-78"/>
+                <a:ea typeface="Amiri" pitchFamily="2" charset="-78"/>
                 <a:cs typeface="Amiri" pitchFamily="2" charset="-78"/>
               </a:rPr>
               <a:t>بِالْقِطَارِ</a:t>
@@ -16704,6 +16798,7 @@
                   <a:srgbClr val="1B3B6F"/>
                 </a:solidFill>
                 <a:latin typeface="Amiri" pitchFamily="2" charset="-78"/>
+                <a:ea typeface="Amiri" pitchFamily="2" charset="-78"/>
                 <a:cs typeface="Amiri" pitchFamily="2" charset="-78"/>
               </a:rPr>
               <a:t>بِالسَّيَّارَةِ</a:t>
@@ -16837,6 +16932,7 @@
                   <a:srgbClr val="D4AF37"/>
                 </a:solidFill>
                 <a:latin typeface="Amiri" pitchFamily="2" charset="-78"/>
+                <a:ea typeface="Amiri" pitchFamily="2" charset="-78"/>
                 <a:cs typeface="Amiri" pitchFamily="2" charset="-78"/>
               </a:rPr>
               <a:t>م</a:t>
@@ -17157,6 +17253,7 @@
                   <a:srgbClr val="8A6D1E"/>
                 </a:solidFill>
                 <a:latin typeface="Amiri" pitchFamily="2" charset="-78"/>
+                <a:ea typeface="Amiri" pitchFamily="2" charset="-78"/>
                 <a:cs typeface="Amiri" pitchFamily="2" charset="-78"/>
               </a:rPr>
               <a:t>صَحِّحِ الخَطَأَ</a:t>
@@ -17330,6 +17427,7 @@
                   <a:srgbClr val="B83227"/>
                 </a:solidFill>
                 <a:latin typeface="Amiri" pitchFamily="2" charset="-78"/>
+                <a:ea typeface="Amiri" pitchFamily="2" charset="-78"/>
                 <a:cs typeface="Amiri" pitchFamily="2" charset="-78"/>
               </a:rPr>
               <a:t>كَتَبْتُ بِعِنَايَةٌ.</a:t>
@@ -17503,6 +17601,7 @@
                   <a:srgbClr val="B83227"/>
                 </a:solidFill>
                 <a:latin typeface="Amiri" pitchFamily="2" charset="-78"/>
+                <a:ea typeface="Amiri" pitchFamily="2" charset="-78"/>
                 <a:cs typeface="Amiri" pitchFamily="2" charset="-78"/>
               </a:rPr>
               <a:t>أَجَابَ بِسَرِيعٍ.</a:t>
@@ -17676,6 +17775,7 @@
                   <a:srgbClr val="B83227"/>
                 </a:solidFill>
                 <a:latin typeface="Amiri" pitchFamily="2" charset="-78"/>
+                <a:ea typeface="Amiri" pitchFamily="2" charset="-78"/>
                 <a:cs typeface="Amiri" pitchFamily="2" charset="-78"/>
               </a:rPr>
               <a:t>نَلْعَبُ فِي الْحَدِيقَةُ.</a:t>
@@ -17847,6 +17947,7 @@
                   <a:srgbClr val="D4AF37"/>
                 </a:solidFill>
                 <a:latin typeface="Amiri" pitchFamily="2" charset="-78"/>
+                <a:ea typeface="Amiri" pitchFamily="2" charset="-78"/>
                 <a:cs typeface="Amiri" pitchFamily="2" charset="-78"/>
               </a:rPr>
               <a:t>م</a:t>
@@ -18167,6 +18268,7 @@
                   <a:srgbClr val="8A6D1E"/>
                 </a:solidFill>
                 <a:latin typeface="Amiri" pitchFamily="2" charset="-78"/>
+                <a:ea typeface="Amiri" pitchFamily="2" charset="-78"/>
                 <a:cs typeface="Amiri" pitchFamily="2" charset="-78"/>
               </a:rPr>
               <a:t>التَّصْحِيحُ وَالسَّبَبُ</a:t>
@@ -18277,6 +18379,7 @@
                   <a:srgbClr val="B83227"/>
                 </a:solidFill>
                 <a:latin typeface="Amiri" pitchFamily="2" charset="-78"/>
+                <a:ea typeface="Amiri" pitchFamily="2" charset="-78"/>
                 <a:cs typeface="Amiri" pitchFamily="2" charset="-78"/>
               </a:rPr>
               <a:t>كَتَبْتُ بِعِنَايَةٌ.</a:t>
@@ -18376,6 +18479,7 @@
                   <a:srgbClr val="1E6B52"/>
                 </a:solidFill>
                 <a:latin typeface="Amiri" pitchFamily="2" charset="-78"/>
+                <a:ea typeface="Amiri" pitchFamily="2" charset="-78"/>
                 <a:cs typeface="Amiri" pitchFamily="2" charset="-78"/>
               </a:rPr>
               <a:t>كَتَبْتُ بِعِنَايَةٍ.</a:t>
@@ -18486,6 +18590,7 @@
                   <a:srgbClr val="B83227"/>
                 </a:solidFill>
                 <a:latin typeface="Amiri" pitchFamily="2" charset="-78"/>
+                <a:ea typeface="Amiri" pitchFamily="2" charset="-78"/>
                 <a:cs typeface="Amiri" pitchFamily="2" charset="-78"/>
               </a:rPr>
               <a:t>أَجَابَ بِسَرِيعٍ.</a:t>
@@ -18585,6 +18690,7 @@
                   <a:srgbClr val="1E6B52"/>
                 </a:solidFill>
                 <a:latin typeface="Amiri" pitchFamily="2" charset="-78"/>
+                <a:ea typeface="Amiri" pitchFamily="2" charset="-78"/>
                 <a:cs typeface="Amiri" pitchFamily="2" charset="-78"/>
               </a:rPr>
               <a:t>أَجَابَ بِسُرْعَةٍ.</a:t>
@@ -18695,6 +18801,7 @@
                   <a:srgbClr val="B83227"/>
                 </a:solidFill>
                 <a:latin typeface="Amiri" pitchFamily="2" charset="-78"/>
+                <a:ea typeface="Amiri" pitchFamily="2" charset="-78"/>
                 <a:cs typeface="Amiri" pitchFamily="2" charset="-78"/>
               </a:rPr>
               <a:t>نَلْعَبُ فِي الْحَدِيقَةُ.</a:t>
@@ -18794,6 +18901,7 @@
                   <a:srgbClr val="1E6B52"/>
                 </a:solidFill>
                 <a:latin typeface="Amiri" pitchFamily="2" charset="-78"/>
+                <a:ea typeface="Amiri" pitchFamily="2" charset="-78"/>
                 <a:cs typeface="Amiri" pitchFamily="2" charset="-78"/>
               </a:rPr>
               <a:t>نَلْعَبُ فِي الْحَدِيقَةِ.</a:t>
@@ -18965,6 +19073,7 @@
                   <a:srgbClr val="D4AF37"/>
                 </a:solidFill>
                 <a:latin typeface="Amiri" pitchFamily="2" charset="-78"/>
+                <a:ea typeface="Amiri" pitchFamily="2" charset="-78"/>
                 <a:cs typeface="Amiri" pitchFamily="2" charset="-78"/>
               </a:rPr>
               <a:t>م</a:t>
@@ -19350,6 +19459,7 @@
                   <a:srgbClr val="8A6D1E"/>
                 </a:solidFill>
                 <a:latin typeface="Amiri" pitchFamily="2" charset="-78"/>
+                <a:ea typeface="Amiri" pitchFamily="2" charset="-78"/>
                 <a:cs typeface="Amiri" pitchFamily="2" charset="-78"/>
               </a:rPr>
               <a:t>تَدْرِيبٌ إِضَافِيٌّ</a:t>
@@ -19624,6 +19734,7 @@
                   <a:srgbClr val="1F2A37"/>
                 </a:solidFill>
                 <a:latin typeface="Amiri" pitchFamily="2" charset="-78"/>
+                <a:ea typeface="Amiri" pitchFamily="2" charset="-78"/>
                 <a:cs typeface="Amiri" pitchFamily="2" charset="-78"/>
               </a:rPr>
               <a:t>وَاضِحَةٌ</a:t>
@@ -19725,6 +19836,7 @@
                   <a:srgbClr val="1F2A37"/>
                 </a:solidFill>
                 <a:latin typeface="Amiri" pitchFamily="2" charset="-78"/>
+                <a:ea typeface="Amiri" pitchFamily="2" charset="-78"/>
                 <a:cs typeface="Amiri" pitchFamily="2" charset="-78"/>
               </a:rPr>
               <a:t>فِي وَاضِحٍ</a:t>
@@ -19826,6 +19938,7 @@
                   <a:srgbClr val="1F2A37"/>
                 </a:solidFill>
                 <a:latin typeface="Amiri" pitchFamily="2" charset="-78"/>
+                <a:ea typeface="Amiri" pitchFamily="2" charset="-78"/>
                 <a:cs typeface="Amiri" pitchFamily="2" charset="-78"/>
               </a:rPr>
               <a:t>بِوُضُوحٍ</a:t>
@@ -19999,6 +20112,7 @@
                   <a:srgbClr val="1F2A37"/>
                 </a:solidFill>
                 <a:latin typeface="Amiri" pitchFamily="2" charset="-78"/>
+                <a:ea typeface="Amiri" pitchFamily="2" charset="-78"/>
                 <a:cs typeface="Amiri" pitchFamily="2" charset="-78"/>
               </a:rPr>
               <a:t>نَلْعَبُ ___ الْحَدِيقَةِ.</a:t>
@@ -20100,6 +20214,7 @@
                   <a:srgbClr val="1F2A37"/>
                 </a:solidFill>
                 <a:latin typeface="Amiri" pitchFamily="2" charset="-78"/>
+                <a:ea typeface="Amiri" pitchFamily="2" charset="-78"/>
                 <a:cs typeface="Amiri" pitchFamily="2" charset="-78"/>
               </a:rPr>
               <a:t>بِسُرْعَةٍ</a:t>
@@ -20201,6 +20316,7 @@
                   <a:srgbClr val="1F2A37"/>
                 </a:solidFill>
                 <a:latin typeface="Amiri" pitchFamily="2" charset="-78"/>
+                <a:ea typeface="Amiri" pitchFamily="2" charset="-78"/>
                 <a:cs typeface="Amiri" pitchFamily="2" charset="-78"/>
               </a:rPr>
               <a:t>فِي</a:t>
@@ -20302,6 +20418,7 @@
                   <a:srgbClr val="1F2A37"/>
                 </a:solidFill>
                 <a:latin typeface="Amiri" pitchFamily="2" charset="-78"/>
+                <a:ea typeface="Amiri" pitchFamily="2" charset="-78"/>
                 <a:cs typeface="Amiri" pitchFamily="2" charset="-78"/>
               </a:rPr>
               <a:t>تَحْتَ فقط</a:t>
@@ -20475,6 +20592,7 @@
                   <a:srgbClr val="1F2A37"/>
                 </a:solidFill>
                 <a:latin typeface="Amiri" pitchFamily="2" charset="-78"/>
+                <a:ea typeface="Amiri" pitchFamily="2" charset="-78"/>
                 <a:cs typeface="Amiri" pitchFamily="2" charset="-78"/>
               </a:rPr>
               <a:t>سَافَرْنَا بِأَمَانٌ.</a:t>
@@ -20576,6 +20694,7 @@
                   <a:srgbClr val="1F2A37"/>
                 </a:solidFill>
                 <a:latin typeface="Amiri" pitchFamily="2" charset="-78"/>
+                <a:ea typeface="Amiri" pitchFamily="2" charset="-78"/>
                 <a:cs typeface="Amiri" pitchFamily="2" charset="-78"/>
               </a:rPr>
               <a:t>سَافَرْنَا أَمَانٌ.</a:t>
@@ -20677,6 +20796,7 @@
                   <a:srgbClr val="1F2A37"/>
                 </a:solidFill>
                 <a:latin typeface="Amiri" pitchFamily="2" charset="-78"/>
+                <a:ea typeface="Amiri" pitchFamily="2" charset="-78"/>
                 <a:cs typeface="Amiri" pitchFamily="2" charset="-78"/>
               </a:rPr>
               <a:t>سَافَرْنَا بِأَمَانٍ.</a:t>
@@ -20778,6 +20898,7 @@
                   <a:srgbClr val="1F2A37"/>
                 </a:solidFill>
                 <a:latin typeface="Amiri" pitchFamily="2" charset="-78"/>
+                <a:ea typeface="Amiri" pitchFamily="2" charset="-78"/>
                 <a:cs typeface="Amiri" pitchFamily="2" charset="-78"/>
               </a:rPr>
               <a:t>سَافَرْنَا بِآمِنَةٌ.</a:t>
@@ -21014,6 +21135,7 @@
                   <a:srgbClr val="1F2A37"/>
                 </a:solidFill>
                 <a:latin typeface="Amiri" pitchFamily="2" charset="-78"/>
+                <a:ea typeface="Amiri" pitchFamily="2" charset="-78"/>
                 <a:cs typeface="Amiri" pitchFamily="2" charset="-78"/>
               </a:rPr>
               <a:t>فَهِمْتُ السُّؤَالَ بِسَهْلٌ.</a:t>
@@ -21115,6 +21237,7 @@
                   <a:srgbClr val="1F2A37"/>
                 </a:solidFill>
                 <a:latin typeface="Amiri" pitchFamily="2" charset="-78"/>
+                <a:ea typeface="Amiri" pitchFamily="2" charset="-78"/>
                 <a:cs typeface="Amiri" pitchFamily="2" charset="-78"/>
               </a:rPr>
               <a:t>فَهِمْتُ بِالسُّؤَالِ سُهُولَةٌ.</a:t>
@@ -21216,6 +21339,7 @@
                   <a:srgbClr val="1F2A37"/>
                 </a:solidFill>
                 <a:latin typeface="Amiri" pitchFamily="2" charset="-78"/>
+                <a:ea typeface="Amiri" pitchFamily="2" charset="-78"/>
                 <a:cs typeface="Amiri" pitchFamily="2" charset="-78"/>
               </a:rPr>
               <a:t>فَهِمْتُ السُّؤَالَ بِسُهُولَةٍ.</a:t>
@@ -21349,6 +21473,7 @@
                   <a:srgbClr val="D4AF37"/>
                 </a:solidFill>
                 <a:latin typeface="Amiri" pitchFamily="2" charset="-78"/>
+                <a:ea typeface="Amiri" pitchFamily="2" charset="-78"/>
                 <a:cs typeface="Amiri" pitchFamily="2" charset="-78"/>
               </a:rPr>
               <a:t>م</a:t>
@@ -21669,6 +21794,7 @@
                   <a:srgbClr val="8A6D1E"/>
                 </a:solidFill>
                 <a:latin typeface="Amiri" pitchFamily="2" charset="-78"/>
+                <a:ea typeface="Amiri" pitchFamily="2" charset="-78"/>
                 <a:cs typeface="Amiri" pitchFamily="2" charset="-78"/>
               </a:rPr>
               <a:t>آدَابُ الصَّفِّ</a:t>
@@ -23200,6 +23326,7 @@
                   <a:srgbClr val="D4AF37"/>
                 </a:solidFill>
                 <a:latin typeface="Amiri" pitchFamily="2" charset="-78"/>
+                <a:ea typeface="Amiri" pitchFamily="2" charset="-78"/>
                 <a:cs typeface="Amiri" pitchFamily="2" charset="-78"/>
               </a:rPr>
               <a:t>م</a:t>
@@ -23585,6 +23712,7 @@
                   <a:srgbClr val="8A6D1E"/>
                 </a:solidFill>
                 <a:latin typeface="Amiri" pitchFamily="2" charset="-78"/>
+                <a:ea typeface="Amiri" pitchFamily="2" charset="-78"/>
                 <a:cs typeface="Amiri" pitchFamily="2" charset="-78"/>
               </a:rPr>
               <a:t>الإِجَابَاتُ وَالتَّعْلِيلُ</a:t>
@@ -23859,6 +23987,7 @@
                   <a:srgbClr val="9AA1AB"/>
                 </a:solidFill>
                 <a:latin typeface="Amiri" pitchFamily="2" charset="-78"/>
+                <a:ea typeface="Amiri" pitchFamily="2" charset="-78"/>
                 <a:cs typeface="Amiri" pitchFamily="2" charset="-78"/>
               </a:rPr>
               <a:t>وَاضِحَةٌ</a:t>
@@ -23960,6 +24089,7 @@
                   <a:srgbClr val="9AA1AB"/>
                 </a:solidFill>
                 <a:latin typeface="Amiri" pitchFamily="2" charset="-78"/>
+                <a:ea typeface="Amiri" pitchFamily="2" charset="-78"/>
                 <a:cs typeface="Amiri" pitchFamily="2" charset="-78"/>
               </a:rPr>
               <a:t>فِي وَاضِحٍ</a:t>
@@ -24088,6 +24218,7 @@
                   <a:srgbClr val="1F2A37"/>
                 </a:solidFill>
                 <a:latin typeface="Amiri" pitchFamily="2" charset="-78"/>
+                <a:ea typeface="Amiri" pitchFamily="2" charset="-78"/>
                 <a:cs typeface="Amiri" pitchFamily="2" charset="-78"/>
               </a:rPr>
               <a:t>بِوُضُوحٍ</a:t>
@@ -24299,6 +24430,7 @@
                   <a:srgbClr val="1F2A37"/>
                 </a:solidFill>
                 <a:latin typeface="Amiri" pitchFamily="2" charset="-78"/>
+                <a:ea typeface="Amiri" pitchFamily="2" charset="-78"/>
                 <a:cs typeface="Amiri" pitchFamily="2" charset="-78"/>
               </a:rPr>
               <a:t>نَلْعَبُ ___ الْحَدِيقَةِ.</a:t>
@@ -24400,6 +24532,7 @@
                   <a:srgbClr val="9AA1AB"/>
                 </a:solidFill>
                 <a:latin typeface="Amiri" pitchFamily="2" charset="-78"/>
+                <a:ea typeface="Amiri" pitchFamily="2" charset="-78"/>
                 <a:cs typeface="Amiri" pitchFamily="2" charset="-78"/>
               </a:rPr>
               <a:t>بِسُرْعَةٍ</a:t>
@@ -24528,6 +24661,7 @@
                   <a:srgbClr val="1F2A37"/>
                 </a:solidFill>
                 <a:latin typeface="Amiri" pitchFamily="2" charset="-78"/>
+                <a:ea typeface="Amiri" pitchFamily="2" charset="-78"/>
                 <a:cs typeface="Amiri" pitchFamily="2" charset="-78"/>
               </a:rPr>
               <a:t>فِي</a:t>
@@ -24629,6 +24763,7 @@
                   <a:srgbClr val="9AA1AB"/>
                 </a:solidFill>
                 <a:latin typeface="Amiri" pitchFamily="2" charset="-78"/>
+                <a:ea typeface="Amiri" pitchFamily="2" charset="-78"/>
                 <a:cs typeface="Amiri" pitchFamily="2" charset="-78"/>
               </a:rPr>
               <a:t>تَحْتَ فقط</a:t>
@@ -24840,6 +24975,7 @@
                   <a:srgbClr val="1F2A37"/>
                 </a:solidFill>
                 <a:latin typeface="Amiri" pitchFamily="2" charset="-78"/>
+                <a:ea typeface="Amiri" pitchFamily="2" charset="-78"/>
                 <a:cs typeface="Amiri" pitchFamily="2" charset="-78"/>
               </a:rPr>
               <a:t>سَافَرْنَا بِأَمَانٌ.</a:t>
@@ -24941,6 +25077,7 @@
                   <a:srgbClr val="9AA1AB"/>
                 </a:solidFill>
                 <a:latin typeface="Amiri" pitchFamily="2" charset="-78"/>
+                <a:ea typeface="Amiri" pitchFamily="2" charset="-78"/>
                 <a:cs typeface="Amiri" pitchFamily="2" charset="-78"/>
               </a:rPr>
               <a:t>سَافَرْنَا أَمَانٌ.</a:t>
@@ -25069,6 +25206,7 @@
                   <a:srgbClr val="1F2A37"/>
                 </a:solidFill>
                 <a:latin typeface="Amiri" pitchFamily="2" charset="-78"/>
+                <a:ea typeface="Amiri" pitchFamily="2" charset="-78"/>
                 <a:cs typeface="Amiri" pitchFamily="2" charset="-78"/>
               </a:rPr>
               <a:t>سَافَرْنَا بِأَمَانٍ.</a:t>
@@ -25170,6 +25308,7 @@
                   <a:srgbClr val="9AA1AB"/>
                 </a:solidFill>
                 <a:latin typeface="Amiri" pitchFamily="2" charset="-78"/>
+                <a:ea typeface="Amiri" pitchFamily="2" charset="-78"/>
                 <a:cs typeface="Amiri" pitchFamily="2" charset="-78"/>
               </a:rPr>
               <a:t>سَافَرْنَا بِآمِنَةٌ.</a:t>
@@ -25444,6 +25583,7 @@
                   <a:srgbClr val="9AA1AB"/>
                 </a:solidFill>
                 <a:latin typeface="Amiri" pitchFamily="2" charset="-78"/>
+                <a:ea typeface="Amiri" pitchFamily="2" charset="-78"/>
                 <a:cs typeface="Amiri" pitchFamily="2" charset="-78"/>
               </a:rPr>
               <a:t>فَهِمْتُ السُّؤَالَ بِسَهْلٌ.</a:t>
@@ -25545,6 +25685,7 @@
                   <a:srgbClr val="9AA1AB"/>
                 </a:solidFill>
                 <a:latin typeface="Amiri" pitchFamily="2" charset="-78"/>
+                <a:ea typeface="Amiri" pitchFamily="2" charset="-78"/>
                 <a:cs typeface="Amiri" pitchFamily="2" charset="-78"/>
               </a:rPr>
               <a:t>فَهِمْتُ بِالسُّؤَالِ سُهُولَةٌ.</a:t>
@@ -25673,6 +25814,7 @@
                   <a:srgbClr val="1F2A37"/>
                 </a:solidFill>
                 <a:latin typeface="Amiri" pitchFamily="2" charset="-78"/>
+                <a:ea typeface="Amiri" pitchFamily="2" charset="-78"/>
                 <a:cs typeface="Amiri" pitchFamily="2" charset="-78"/>
               </a:rPr>
               <a:t>فَهِمْتُ السُّؤَالَ بِسُهُولَةٍ.</a:t>
@@ -25844,6 +25986,7 @@
                   <a:srgbClr val="D4AF37"/>
                 </a:solidFill>
                 <a:latin typeface="Amiri" pitchFamily="2" charset="-78"/>
+                <a:ea typeface="Amiri" pitchFamily="2" charset="-78"/>
                 <a:cs typeface="Amiri" pitchFamily="2" charset="-78"/>
               </a:rPr>
               <a:t>م</a:t>
@@ -26164,6 +26307,7 @@
                   <a:srgbClr val="8A6D1E"/>
                 </a:solidFill>
                 <a:latin typeface="Amiri" pitchFamily="2" charset="-78"/>
+                <a:ea typeface="Amiri" pitchFamily="2" charset="-78"/>
                 <a:cs typeface="Amiri" pitchFamily="2" charset="-78"/>
               </a:rPr>
               <a:t>اِقْرَأْ وَلَاحِظْ</a:t>
@@ -26277,6 +26421,7 @@
                   <a:srgbClr val="1F2A37"/>
                 </a:solidFill>
                 <a:latin typeface="Amiri" pitchFamily="2" charset="-78"/>
+                <a:ea typeface="Amiri" pitchFamily="2" charset="-78"/>
                 <a:cs typeface="Amiri" pitchFamily="2" charset="-78"/>
               </a:rPr>
               <a:t>فِي الصَّبَاحِ ذَهَبْتُ إِلَى الْمَدْرَسَةِ بِالْحَافِلَةِ. أَجَبْتُ عَنِ الْأَسْئِلَةِ بِعِنَايَةٍ، وَلَكِنِّي أَكْمَلْتُ التَّمْرِينَ الْأَخِيرَ بِصُعُوبَةٍ. فِي الِاسْتِرَاحَةِ أَكَلْتُ بِسُرْعَةٍ وَلَعِبْتُ فِي السَّاحَةِ. فِي الْمَسَاءِ رَجَعْتُ إِلَى الْبَيْتِ بِأَمَانٍ.</a:t>
@@ -26387,6 +26532,7 @@
                   <a:srgbClr val="1B3B6F"/>
                 </a:solidFill>
                 <a:latin typeface="Amiri" pitchFamily="2" charset="-78"/>
+                <a:ea typeface="Amiri" pitchFamily="2" charset="-78"/>
                 <a:cs typeface="Amiri" pitchFamily="2" charset="-78"/>
               </a:rPr>
               <a:t>بِالْحَافِلَةِ</a:t>
@@ -26463,6 +26609,7 @@
                   <a:srgbClr val="1B3B6F"/>
                 </a:solidFill>
                 <a:latin typeface="Amiri" pitchFamily="2" charset="-78"/>
+                <a:ea typeface="Amiri" pitchFamily="2" charset="-78"/>
                 <a:cs typeface="Amiri" pitchFamily="2" charset="-78"/>
               </a:rPr>
               <a:t>أَجَبْتُ عَنْ</a:t>
@@ -26539,6 +26686,7 @@
                   <a:srgbClr val="1B3B6F"/>
                 </a:solidFill>
                 <a:latin typeface="Amiri" pitchFamily="2" charset="-78"/>
+                <a:ea typeface="Amiri" pitchFamily="2" charset="-78"/>
                 <a:cs typeface="Amiri" pitchFamily="2" charset="-78"/>
               </a:rPr>
               <a:t>التَّمْرِينَ الْأَخِيرَ</a:t>
@@ -26615,6 +26763,7 @@
                   <a:srgbClr val="1B3B6F"/>
                 </a:solidFill>
                 <a:latin typeface="Amiri" pitchFamily="2" charset="-78"/>
+                <a:ea typeface="Amiri" pitchFamily="2" charset="-78"/>
                 <a:cs typeface="Amiri" pitchFamily="2" charset="-78"/>
               </a:rPr>
               <a:t>الِاسْتِرَاحَةِ</a:t>
@@ -26691,6 +26840,7 @@
                   <a:srgbClr val="1B3B6F"/>
                 </a:solidFill>
                 <a:latin typeface="Amiri" pitchFamily="2" charset="-78"/>
+                <a:ea typeface="Amiri" pitchFamily="2" charset="-78"/>
                 <a:cs typeface="Amiri" pitchFamily="2" charset="-78"/>
               </a:rPr>
               <a:t>السَّاحَةِ</a:t>
@@ -26767,6 +26917,7 @@
                   <a:srgbClr val="1B3B6F"/>
                 </a:solidFill>
                 <a:latin typeface="Amiri" pitchFamily="2" charset="-78"/>
+                <a:ea typeface="Amiri" pitchFamily="2" charset="-78"/>
                 <a:cs typeface="Amiri" pitchFamily="2" charset="-78"/>
               </a:rPr>
               <a:t>رَجَعْتُ</a:t>
@@ -26938,6 +27089,7 @@
                   <a:srgbClr val="D4AF37"/>
                 </a:solidFill>
                 <a:latin typeface="Amiri" pitchFamily="2" charset="-78"/>
+                <a:ea typeface="Amiri" pitchFamily="2" charset="-78"/>
                 <a:cs typeface="Amiri" pitchFamily="2" charset="-78"/>
               </a:rPr>
               <a:t>م</a:t>
@@ -27258,6 +27410,7 @@
                   <a:srgbClr val="8A6D1E"/>
                 </a:solidFill>
                 <a:latin typeface="Amiri" pitchFamily="2" charset="-78"/>
+                <a:ea typeface="Amiri" pitchFamily="2" charset="-78"/>
                 <a:cs typeface="Amiri" pitchFamily="2" charset="-78"/>
               </a:rPr>
               <a:t>أَسْئِلَةُ القِرَاءَةِ</a:t>
@@ -28846,6 +28999,7 @@
                   <a:srgbClr val="1F2A37"/>
                 </a:solidFill>
                 <a:latin typeface="Amiri" pitchFamily="2" charset="-78"/>
+                <a:ea typeface="Amiri" pitchFamily="2" charset="-78"/>
                 <a:cs typeface="Amiri" pitchFamily="2" charset="-78"/>
               </a:rPr>
               <a:t>بِأَمَانٍ</a:t>
@@ -28947,6 +29101,7 @@
                   <a:srgbClr val="1F2A37"/>
                 </a:solidFill>
                 <a:latin typeface="Amiri" pitchFamily="2" charset="-78"/>
+                <a:ea typeface="Amiri" pitchFamily="2" charset="-78"/>
                 <a:cs typeface="Amiri" pitchFamily="2" charset="-78"/>
               </a:rPr>
               <a:t>فِي الْمَسَاءِ</a:t>
@@ -29048,6 +29203,7 @@
                   <a:srgbClr val="1F2A37"/>
                 </a:solidFill>
                 <a:latin typeface="Amiri" pitchFamily="2" charset="-78"/>
+                <a:ea typeface="Amiri" pitchFamily="2" charset="-78"/>
                 <a:cs typeface="Amiri" pitchFamily="2" charset="-78"/>
               </a:rPr>
               <a:t>بِعِنَايَةٍ</a:t>
@@ -29323,6 +29479,7 @@
                   <a:srgbClr val="D4AF37"/>
                 </a:solidFill>
                 <a:latin typeface="Amiri" pitchFamily="2" charset="-78"/>
+                <a:ea typeface="Amiri" pitchFamily="2" charset="-78"/>
                 <a:cs typeface="Amiri" pitchFamily="2" charset="-78"/>
               </a:rPr>
               <a:t>م</a:t>
@@ -29643,6 +29800,7 @@
                   <a:srgbClr val="8A6D1E"/>
                 </a:solidFill>
                 <a:latin typeface="Amiri" pitchFamily="2" charset="-78"/>
+                <a:ea typeface="Amiri" pitchFamily="2" charset="-78"/>
                 <a:cs typeface="Amiri" pitchFamily="2" charset="-78"/>
               </a:rPr>
               <a:t>إِجَابَاتُ القِرَاءَةِ</a:t>
@@ -30184,6 +30342,7 @@
                   <a:srgbClr val="8A6D1E"/>
                 </a:solidFill>
                 <a:latin typeface="Amiri" pitchFamily="2" charset="-78"/>
+                <a:ea typeface="Amiri" pitchFamily="2" charset="-78"/>
                 <a:cs typeface="Amiri" pitchFamily="2" charset="-78"/>
               </a:rPr>
               <a:t>بِالْحَافِلَةِ</a:t>
@@ -30700,6 +30859,7 @@
                   <a:srgbClr val="8A6D1E"/>
                 </a:solidFill>
                 <a:latin typeface="Amiri" pitchFamily="2" charset="-78"/>
+                <a:ea typeface="Amiri" pitchFamily="2" charset="-78"/>
                 <a:cs typeface="Amiri" pitchFamily="2" charset="-78"/>
               </a:rPr>
               <a:t>بِصُعُوبَةٍ.</a:t>
@@ -31203,6 +31363,7 @@
                   <a:srgbClr val="8A6D1E"/>
                 </a:solidFill>
                 <a:latin typeface="Amiri" pitchFamily="2" charset="-78"/>
+                <a:ea typeface="Amiri" pitchFamily="2" charset="-78"/>
                 <a:cs typeface="Amiri" pitchFamily="2" charset="-78"/>
               </a:rPr>
               <a:t>فِي السَّاحَةِ.</a:t>
@@ -31439,6 +31600,7 @@
                   <a:srgbClr val="9AA1AB"/>
                 </a:solidFill>
                 <a:latin typeface="Amiri" pitchFamily="2" charset="-78"/>
+                <a:ea typeface="Amiri" pitchFamily="2" charset="-78"/>
                 <a:cs typeface="Amiri" pitchFamily="2" charset="-78"/>
               </a:rPr>
               <a:t>بِأَمَانٍ</a:t>
@@ -31567,6 +31729,7 @@
                   <a:srgbClr val="1F2A37"/>
                 </a:solidFill>
                 <a:latin typeface="Amiri" pitchFamily="2" charset="-78"/>
+                <a:ea typeface="Amiri" pitchFamily="2" charset="-78"/>
                 <a:cs typeface="Amiri" pitchFamily="2" charset="-78"/>
               </a:rPr>
               <a:t>فِي الْمَسَاءِ</a:t>
@@ -31668,6 +31831,7 @@
                   <a:srgbClr val="9AA1AB"/>
                 </a:solidFill>
                 <a:latin typeface="Amiri" pitchFamily="2" charset="-78"/>
+                <a:ea typeface="Amiri" pitchFamily="2" charset="-78"/>
                 <a:cs typeface="Amiri" pitchFamily="2" charset="-78"/>
               </a:rPr>
               <a:t>بِعِنَايَةٍ</a:t>
@@ -31981,6 +32145,7 @@
                   <a:srgbClr val="D4AF37"/>
                 </a:solidFill>
                 <a:latin typeface="Amiri" pitchFamily="2" charset="-78"/>
+                <a:ea typeface="Amiri" pitchFamily="2" charset="-78"/>
                 <a:cs typeface="Amiri" pitchFamily="2" charset="-78"/>
               </a:rPr>
               <a:t>م</a:t>
@@ -32301,6 +32466,7 @@
                   <a:srgbClr val="8A6D1E"/>
                 </a:solidFill>
                 <a:latin typeface="Amiri" pitchFamily="2" charset="-78"/>
+                <a:ea typeface="Amiri" pitchFamily="2" charset="-78"/>
                 <a:cs typeface="Amiri" pitchFamily="2" charset="-78"/>
               </a:rPr>
               <a:t>التَّحَدُّثُ</a:t>
@@ -33071,6 +33237,7 @@
                   <a:srgbClr val="1B3B6F"/>
                 </a:solidFill>
                 <a:latin typeface="Amiri" pitchFamily="2" charset="-78"/>
+                <a:ea typeface="Amiri" pitchFamily="2" charset="-78"/>
                 <a:cs typeface="Amiri" pitchFamily="2" charset="-78"/>
               </a:rPr>
               <a:t>كَيْفَ تَكْتُبُ وَاجِبَكَ؟</a:t>
@@ -33208,6 +33375,7 @@
                   <a:srgbClr val="1B3B6F"/>
                 </a:solidFill>
                 <a:latin typeface="Amiri" pitchFamily="2" charset="-78"/>
+                <a:ea typeface="Amiri" pitchFamily="2" charset="-78"/>
                 <a:cs typeface="Amiri" pitchFamily="2" charset="-78"/>
               </a:rPr>
               <a:t>كَيْفَ تَسْتَعِدُّ لِلِاخْتِبَارِ؟ مَتَى؟ أَيْنَ؟</a:t>
@@ -33345,6 +33513,7 @@
                   <a:srgbClr val="1B3B6F"/>
                 </a:solidFill>
                 <a:latin typeface="Amiri" pitchFamily="2" charset="-78"/>
+                <a:ea typeface="Amiri" pitchFamily="2" charset="-78"/>
                 <a:cs typeface="Amiri" pitchFamily="2" charset="-78"/>
               </a:rPr>
               <a:t>اشْرَحْ لِصَدِيقٍ كَيْفَ يَقْطَعُ الشَّارِعَ بِأَمَانٍ.</a:t>
@@ -33520,6 +33689,7 @@
                   <a:srgbClr val="1D5FBF"/>
                 </a:solidFill>
                 <a:latin typeface="Amiri" pitchFamily="2" charset="-78"/>
+                <a:ea typeface="Amiri" pitchFamily="2" charset="-78"/>
                 <a:cs typeface="Amiri" pitchFamily="2" charset="-78"/>
               </a:rPr>
               <a:t>أَكْتُبُ وَاجِبِي ___ .</a:t>
@@ -33623,6 +33793,7 @@
                   <a:srgbClr val="1F2A37"/>
                 </a:solidFill>
                 <a:latin typeface="Amiri" pitchFamily="2" charset="-78"/>
+                <a:ea typeface="Amiri" pitchFamily="2" charset="-78"/>
                 <a:cs typeface="Amiri" pitchFamily="2" charset="-78"/>
               </a:rPr>
               <a:t>فِي ___ أَدْرُسُ فِي ___ ___ .</a:t>
@@ -33726,6 +33897,7 @@
                   <a:srgbClr val="1F2A37"/>
                 </a:solidFill>
                 <a:latin typeface="Amiri" pitchFamily="2" charset="-78"/>
+                <a:ea typeface="Amiri" pitchFamily="2" charset="-78"/>
                 <a:cs typeface="Amiri" pitchFamily="2" charset="-78"/>
               </a:rPr>
               <a:t>انْظُرْ ___ ، ثُمَّ امْشِ ___ .</a:t>
@@ -33899,6 +34071,7 @@
                   <a:srgbClr val="1F2A37"/>
                 </a:solidFill>
                 <a:latin typeface="Amiri" pitchFamily="2" charset="-78"/>
+                <a:ea typeface="Amiri" pitchFamily="2" charset="-78"/>
                 <a:cs typeface="Amiri" pitchFamily="2" charset="-78"/>
               </a:rPr>
               <a:t>كَيْفَ تُرَاجِعُ لِلِاخْتِبَارِ؟</a:t>
@@ -34038,6 +34211,7 @@
                   <a:srgbClr val="1F2A37"/>
                 </a:solidFill>
                 <a:latin typeface="Amiri" pitchFamily="2" charset="-78"/>
+                <a:ea typeface="Amiri" pitchFamily="2" charset="-78"/>
                 <a:cs typeface="Amiri" pitchFamily="2" charset="-78"/>
               </a:rPr>
               <a:t>فِي الْمَسَاءِ أُرَاجِعُ فِي غُرْفَتِي بِهُدُوءٍ. أَقْرَأُ الْمُلَاحَظَاتِ بِعِنَايَةٍ، ثُمَّ أَكْتُبُ الْكَلِمَاتِ بِسُرْعَةٍ.</a:t>
@@ -34209,6 +34383,7 @@
                   <a:srgbClr val="D4AF37"/>
                 </a:solidFill>
                 <a:latin typeface="Amiri" pitchFamily="2" charset="-78"/>
+                <a:ea typeface="Amiri" pitchFamily="2" charset="-78"/>
                 <a:cs typeface="Amiri" pitchFamily="2" charset="-78"/>
               </a:rPr>
               <a:t>م</a:t>
@@ -34529,6 +34704,7 @@
                   <a:srgbClr val="8A6D1E"/>
                 </a:solidFill>
                 <a:latin typeface="Amiri" pitchFamily="2" charset="-78"/>
+                <a:ea typeface="Amiri" pitchFamily="2" charset="-78"/>
                 <a:cs typeface="Amiri" pitchFamily="2" charset="-78"/>
               </a:rPr>
               <a:t>اُكْتُبْ</a:t>
@@ -34704,6 +34880,7 @@
                   <a:srgbClr val="2E8B57"/>
                 </a:solidFill>
                 <a:latin typeface="Amiri" pitchFamily="2" charset="-78"/>
+                <a:ea typeface="Amiri" pitchFamily="2" charset="-78"/>
                 <a:cs typeface="Amiri" pitchFamily="2" charset="-78"/>
               </a:rPr>
               <a:t>الأَسَاسُ</a:t>
@@ -34998,6 +35175,7 @@
                   <a:srgbClr val="C9780A"/>
                 </a:solidFill>
                 <a:latin typeface="Amiri" pitchFamily="2" charset="-78"/>
+                <a:ea typeface="Amiri" pitchFamily="2" charset="-78"/>
                 <a:cs typeface="Amiri" pitchFamily="2" charset="-78"/>
               </a:rPr>
               <a:t>التَّطْوِيرُ</a:t>
@@ -35292,6 +35470,7 @@
                   <a:srgbClr val="B83227"/>
                 </a:solidFill>
                 <a:latin typeface="Amiri" pitchFamily="2" charset="-78"/>
+                <a:ea typeface="Amiri" pitchFamily="2" charset="-78"/>
                 <a:cs typeface="Amiri" pitchFamily="2" charset="-78"/>
               </a:rPr>
               <a:t>التَّحَدِّي</a:t>
@@ -35582,6 +35761,7 @@
                   <a:srgbClr val="D4AF37"/>
                 </a:solidFill>
                 <a:latin typeface="Amiri" pitchFamily="2" charset="-78"/>
+                <a:ea typeface="Amiri" pitchFamily="2" charset="-78"/>
                 <a:cs typeface="Amiri" pitchFamily="2" charset="-78"/>
               </a:rPr>
               <a:t>م</a:t>
@@ -35902,6 +36082,7 @@
                   <a:srgbClr val="8A6D1E"/>
                 </a:solidFill>
                 <a:latin typeface="Amiri" pitchFamily="2" charset="-78"/>
+                <a:ea typeface="Amiri" pitchFamily="2" charset="-78"/>
                 <a:cs typeface="Amiri" pitchFamily="2" charset="-78"/>
               </a:rPr>
               <a:t>قَوَالِبُ الجُمَلِ</a:t>
@@ -36077,6 +36258,7 @@
                   <a:srgbClr val="1B3B6F"/>
                 </a:solidFill>
                 <a:latin typeface="Amiri" pitchFamily="2" charset="-78"/>
+                <a:ea typeface="Amiri" pitchFamily="2" charset="-78"/>
                 <a:cs typeface="Amiri" pitchFamily="2" charset="-78"/>
               </a:rPr>
               <a:t>فِي الصَّبَاحِ ______ .</a:t>
@@ -36153,6 +36335,7 @@
                   <a:srgbClr val="1B3B6F"/>
                 </a:solidFill>
                 <a:latin typeface="Amiri" pitchFamily="2" charset="-78"/>
+                <a:ea typeface="Amiri" pitchFamily="2" charset="-78"/>
                 <a:cs typeface="Amiri" pitchFamily="2" charset="-78"/>
               </a:rPr>
               <a:t>أَدْرُسُ فِي ______ .</a:t>
@@ -36229,6 +36412,7 @@
                   <a:srgbClr val="1B3B6F"/>
                 </a:solidFill>
                 <a:latin typeface="Amiri" pitchFamily="2" charset="-78"/>
+                <a:ea typeface="Amiri" pitchFamily="2" charset="-78"/>
                 <a:cs typeface="Amiri" pitchFamily="2" charset="-78"/>
               </a:rPr>
               <a:t>فَهِمْتُ الدَّرْسَ ______ .</a:t>
@@ -36305,6 +36489,7 @@
                   <a:srgbClr val="1B3B6F"/>
                 </a:solidFill>
                 <a:latin typeface="Amiri" pitchFamily="2" charset="-78"/>
+                <a:ea typeface="Amiri" pitchFamily="2" charset="-78"/>
                 <a:cs typeface="Amiri" pitchFamily="2" charset="-78"/>
               </a:rPr>
               <a:t>فِي الشِّتَاءِ ______ .</a:t>
@@ -36480,6 +36665,7 @@
                   <a:srgbClr val="1B3B6F"/>
                 </a:solidFill>
                 <a:latin typeface="Amiri" pitchFamily="2" charset="-78"/>
+                <a:ea typeface="Amiri" pitchFamily="2" charset="-78"/>
                 <a:cs typeface="Amiri" pitchFamily="2" charset="-78"/>
               </a:rPr>
               <a:t>أَقْرَأُ التَّعْلِيمَاتِ ______ .</a:t>
@@ -36556,6 +36742,7 @@
                   <a:srgbClr val="1B3B6F"/>
                 </a:solidFill>
                 <a:latin typeface="Amiri" pitchFamily="2" charset="-78"/>
+                <a:ea typeface="Amiri" pitchFamily="2" charset="-78"/>
                 <a:cs typeface="Amiri" pitchFamily="2" charset="-78"/>
               </a:rPr>
               <a:t>أَكْتُبُ إِجَابَاتِي ______ .</a:t>
@@ -36632,6 +36819,7 @@
                   <a:srgbClr val="1B3B6F"/>
                 </a:solidFill>
                 <a:latin typeface="Amiri" pitchFamily="2" charset="-78"/>
+                <a:ea typeface="Amiri" pitchFamily="2" charset="-78"/>
                 <a:cs typeface="Amiri" pitchFamily="2" charset="-78"/>
               </a:rPr>
               <a:t>آكُلُ الْفَطُورَ ______ .</a:t>
@@ -36708,6 +36896,7 @@
                   <a:srgbClr val="1B3B6F"/>
                 </a:solidFill>
                 <a:latin typeface="Amiri" pitchFamily="2" charset="-78"/>
+                <a:ea typeface="Amiri" pitchFamily="2" charset="-78"/>
                 <a:cs typeface="Amiri" pitchFamily="2" charset="-78"/>
               </a:rPr>
               <a:t>أَذْهَبُ إِلَى الْمَدْرَسَةِ ______ .</a:t>
@@ -36856,6 +37045,7 @@
                   <a:srgbClr val="1B3B6F"/>
                 </a:solidFill>
                 <a:latin typeface="Amiri" pitchFamily="2" charset="-78"/>
+                <a:ea typeface="Amiri" pitchFamily="2" charset="-78"/>
                 <a:cs typeface="Amiri" pitchFamily="2" charset="-78"/>
               </a:rPr>
               <a:t>بِسُرْعَةٍ  ·  بِبُطْءٍ  ·  بِسُهُولَةٍ  ·  بِصُعُوبَةٍ  ·  بِهُدُوءٍ  ·  بِوُضُوحٍ  ·  بِعِنَايَةٍ  ·  بِأَمَانٍ  ·  بِالْحَافِلَةِ  ·  فِي الْبَيْتِ  ·  فِي الْمَسَاءِ  ·  فِي غُرْفَتِي</a:t>
@@ -36989,6 +37179,7 @@
                   <a:srgbClr val="D4AF37"/>
                 </a:solidFill>
                 <a:latin typeface="Amiri" pitchFamily="2" charset="-78"/>
+                <a:ea typeface="Amiri" pitchFamily="2" charset="-78"/>
                 <a:cs typeface="Amiri" pitchFamily="2" charset="-78"/>
               </a:rPr>
               <a:t>م</a:t>
@@ -37309,6 +37500,7 @@
                   <a:srgbClr val="8A6D1E"/>
                 </a:solidFill>
                 <a:latin typeface="Amiri" pitchFamily="2" charset="-78"/>
+                <a:ea typeface="Amiri" pitchFamily="2" charset="-78"/>
                 <a:cs typeface="Amiri" pitchFamily="2" charset="-78"/>
               </a:rPr>
               <a:t>مُهِمَّةُ التَّحَدِّي</a:t>
@@ -37784,6 +37976,7 @@
                   <a:srgbClr val="1B3B6F"/>
                 </a:solidFill>
                 <a:latin typeface="Amiri" pitchFamily="2" charset="-78"/>
+                <a:ea typeface="Amiri" pitchFamily="2" charset="-78"/>
                 <a:cs typeface="Amiri" pitchFamily="2" charset="-78"/>
               </a:rPr>
               <a:t>بِعِنَايَةٍ</a:t>
@@ -37860,6 +38053,7 @@
                   <a:srgbClr val="1B3B6F"/>
                 </a:solidFill>
                 <a:latin typeface="Amiri" pitchFamily="2" charset="-78"/>
+                <a:ea typeface="Amiri" pitchFamily="2" charset="-78"/>
                 <a:cs typeface="Amiri" pitchFamily="2" charset="-78"/>
               </a:rPr>
               <a:t>بِوُضُوحٍ</a:t>
@@ -37936,6 +38130,7 @@
                   <a:srgbClr val="1B3B6F"/>
                 </a:solidFill>
                 <a:latin typeface="Amiri" pitchFamily="2" charset="-78"/>
+                <a:ea typeface="Amiri" pitchFamily="2" charset="-78"/>
                 <a:cs typeface="Amiri" pitchFamily="2" charset="-78"/>
               </a:rPr>
               <a:t>بِالسَّيَّارَةِ</a:t>
@@ -38012,6 +38207,7 @@
                   <a:srgbClr val="1B3B6F"/>
                 </a:solidFill>
                 <a:latin typeface="Amiri" pitchFamily="2" charset="-78"/>
+                <a:ea typeface="Amiri" pitchFamily="2" charset="-78"/>
                 <a:cs typeface="Amiri" pitchFamily="2" charset="-78"/>
               </a:rPr>
               <a:t>فِي الْمَطْبَخِ</a:t>
@@ -38088,6 +38284,7 @@
                   <a:srgbClr val="1B3B6F"/>
                 </a:solidFill>
                 <a:latin typeface="Amiri" pitchFamily="2" charset="-78"/>
+                <a:ea typeface="Amiri" pitchFamily="2" charset="-78"/>
                 <a:cs typeface="Amiri" pitchFamily="2" charset="-78"/>
               </a:rPr>
               <a:t>فِي نِهَايَةِ الْأُسْبُوعِ</a:t>
@@ -38164,6 +38361,7 @@
                   <a:srgbClr val="1B3B6F"/>
                 </a:solidFill>
                 <a:latin typeface="Amiri" pitchFamily="2" charset="-78"/>
+                <a:ea typeface="Amiri" pitchFamily="2" charset="-78"/>
                 <a:cs typeface="Amiri" pitchFamily="2" charset="-78"/>
               </a:rPr>
               <a:t>بِأَمَانٍ</a:t>
@@ -38335,6 +38533,7 @@
                   <a:srgbClr val="D4AF37"/>
                 </a:solidFill>
                 <a:latin typeface="Amiri" pitchFamily="2" charset="-78"/>
+                <a:ea typeface="Amiri" pitchFamily="2" charset="-78"/>
                 <a:cs typeface="Amiri" pitchFamily="2" charset="-78"/>
               </a:rPr>
               <a:t>م</a:t>
@@ -38655,6 +38854,7 @@
                   <a:srgbClr val="8A6D1E"/>
                 </a:solidFill>
                 <a:latin typeface="Amiri" pitchFamily="2" charset="-78"/>
+                <a:ea typeface="Amiri" pitchFamily="2" charset="-78"/>
                 <a:cs typeface="Amiri" pitchFamily="2" charset="-78"/>
               </a:rPr>
               <a:t>نَمُوذَجُ الإِجَابَةِ</a:t>
@@ -38768,6 +38968,7 @@
                   <a:srgbClr val="1F2A37"/>
                 </a:solidFill>
                 <a:latin typeface="Amiri" pitchFamily="2" charset="-78"/>
+                <a:ea typeface="Amiri" pitchFamily="2" charset="-78"/>
                 <a:cs typeface="Amiri" pitchFamily="2" charset="-78"/>
               </a:rPr>
               <a:t>أُحِبُّ الطَّبْخَ فِي نِهَايَةِ الْأُسْبُوعِ. فِي الصَّبَاحِ أَذْهَبُ إِلَى السُّوقِ بِالدَّرَّاجَةِ، وَأَخْتَارُ الْخُضَارَ بِعِنَايَةٍ. فِي الْمَطْبَخِ أَغْسِلُ يَدَيَّ جَيِّدًا، ثُمَّ أَقْطَعُ الْخُضَارَ بِبُطْءٍ وَبِأَمَانٍ. أَقْرَأُ الْوَصْفَةَ بِوُضُوحٍ لِأُخْتِي، وَهِيَ تُسَاعِدُنِي بِسُرْعَةٍ. فِي الْمَسَاءِ نَأْكُلُ مَعًا بِسَعَادَةٍ.</a:t>
@@ -39264,6 +39465,7 @@
                   <a:srgbClr val="D4AF37"/>
                 </a:solidFill>
                 <a:latin typeface="Amiri" pitchFamily="2" charset="-78"/>
+                <a:ea typeface="Amiri" pitchFamily="2" charset="-78"/>
                 <a:cs typeface="Amiri" pitchFamily="2" charset="-78"/>
               </a:rPr>
               <a:t>م</a:t>
@@ -39584,6 +39786,7 @@
                   <a:srgbClr val="8A6D1E"/>
                 </a:solidFill>
                 <a:latin typeface="Amiri" pitchFamily="2" charset="-78"/>
+                <a:ea typeface="Amiri" pitchFamily="2" charset="-78"/>
                 <a:cs typeface="Amiri" pitchFamily="2" charset="-78"/>
               </a:rPr>
               <a:t>قَيِّمْ عَمَلَكَ</a:t>
@@ -40741,6 +40944,7 @@
                   <a:srgbClr val="D4AF37"/>
                 </a:solidFill>
                 <a:latin typeface="Amiri" pitchFamily="2" charset="-78"/>
+                <a:ea typeface="Amiri" pitchFamily="2" charset="-78"/>
                 <a:cs typeface="Amiri" pitchFamily="2" charset="-78"/>
               </a:rPr>
               <a:t>م</a:t>
@@ -41061,6 +41265,7 @@
                   <a:srgbClr val="8A6D1E"/>
                 </a:solidFill>
                 <a:latin typeface="Amiri" pitchFamily="2" charset="-78"/>
+                <a:ea typeface="Amiri" pitchFamily="2" charset="-78"/>
                 <a:cs typeface="Amiri" pitchFamily="2" charset="-78"/>
               </a:rPr>
               <a:t>خَرِيطَةُ الدَّرْسِ</a:t>
@@ -41375,6 +41580,7 @@
                   <a:srgbClr val="0E7C86"/>
                 </a:solidFill>
                 <a:latin typeface="Amiri" pitchFamily="2" charset="-78"/>
+                <a:ea typeface="Amiri" pitchFamily="2" charset="-78"/>
                 <a:cs typeface="Amiri" pitchFamily="2" charset="-78"/>
               </a:rPr>
               <a:t>اِبْدَأِ الآنَ</a:t>
@@ -41651,6 +41857,7 @@
                   <a:srgbClr val="1B3B6F"/>
                 </a:solidFill>
                 <a:latin typeface="Amiri" pitchFamily="2" charset="-78"/>
+                <a:ea typeface="Amiri" pitchFamily="2" charset="-78"/>
                 <a:cs typeface="Amiri" pitchFamily="2" charset="-78"/>
               </a:rPr>
               <a:t>كَلِمَاتٌ وَقَوَاعِدُ</a:t>
@@ -41927,6 +42134,7 @@
                   <a:srgbClr val="6B4C9A"/>
                 </a:solidFill>
                 <a:latin typeface="Amiri" pitchFamily="2" charset="-78"/>
+                <a:ea typeface="Amiri" pitchFamily="2" charset="-78"/>
                 <a:cs typeface="Amiri" pitchFamily="2" charset="-78"/>
               </a:rPr>
               <a:t>شَاهِدْ</a:t>
@@ -42203,6 +42411,7 @@
                   <a:srgbClr val="2F6FB0"/>
                 </a:solidFill>
                 <a:latin typeface="Amiri" pitchFamily="2" charset="-78"/>
+                <a:ea typeface="Amiri" pitchFamily="2" charset="-78"/>
                 <a:cs typeface="Amiri" pitchFamily="2" charset="-78"/>
               </a:rPr>
               <a:t>مَعًا</a:t>
@@ -42479,6 +42688,7 @@
                   <a:srgbClr val="1E6B52"/>
                 </a:solidFill>
                 <a:latin typeface="Amiri" pitchFamily="2" charset="-78"/>
+                <a:ea typeface="Amiri" pitchFamily="2" charset="-78"/>
                 <a:cs typeface="Amiri" pitchFamily="2" charset="-78"/>
               </a:rPr>
               <a:t>وَحْدَكَ</a:t>
@@ -42755,6 +42965,7 @@
                   <a:srgbClr val="8A6D1E"/>
                 </a:solidFill>
                 <a:latin typeface="Amiri" pitchFamily="2" charset="-78"/>
+                <a:ea typeface="Amiri" pitchFamily="2" charset="-78"/>
                 <a:cs typeface="Amiri" pitchFamily="2" charset="-78"/>
               </a:rPr>
               <a:t>قَيِّمْ عَمَلَكَ</a:t>
@@ -43031,6 +43242,7 @@
                   <a:srgbClr val="C45A3C"/>
                 </a:solidFill>
                 <a:latin typeface="Amiri" pitchFamily="2" charset="-78"/>
+                <a:ea typeface="Amiri" pitchFamily="2" charset="-78"/>
                 <a:cs typeface="Amiri" pitchFamily="2" charset="-78"/>
               </a:rPr>
               <a:t>اِسْتَعِدَّ</a:t>
@@ -43274,6 +43486,7 @@
                   <a:srgbClr val="D4AF37"/>
                 </a:solidFill>
                 <a:latin typeface="Amiri" pitchFamily="2" charset="-78"/>
+                <a:ea typeface="Amiri" pitchFamily="2" charset="-78"/>
                 <a:cs typeface="Amiri" pitchFamily="2" charset="-78"/>
               </a:rPr>
               <a:t>م</a:t>
@@ -43594,6 +43807,7 @@
                   <a:srgbClr val="8A6D1E"/>
                 </a:solidFill>
                 <a:latin typeface="Amiri" pitchFamily="2" charset="-78"/>
+                <a:ea typeface="Amiri" pitchFamily="2" charset="-78"/>
                 <a:cs typeface="Amiri" pitchFamily="2" charset="-78"/>
               </a:rPr>
               <a:t>تَذْكِرَةُ الخُرُوجِ</a:t>
@@ -43868,6 +44082,7 @@
                   <a:srgbClr val="1F2A37"/>
                 </a:solidFill>
                 <a:latin typeface="Amiri" pitchFamily="2" charset="-78"/>
+                <a:ea typeface="Amiri" pitchFamily="2" charset="-78"/>
                 <a:cs typeface="Amiri" pitchFamily="2" charset="-78"/>
               </a:rPr>
               <a:t>بِأَمَانٍ</a:t>
@@ -43969,6 +44184,7 @@
                   <a:srgbClr val="1F2A37"/>
                 </a:solidFill>
                 <a:latin typeface="Amiri" pitchFamily="2" charset="-78"/>
+                <a:ea typeface="Amiri" pitchFamily="2" charset="-78"/>
                 <a:cs typeface="Amiri" pitchFamily="2" charset="-78"/>
               </a:rPr>
               <a:t>أَمِينٌ</a:t>
@@ -44070,6 +44286,7 @@
                   <a:srgbClr val="1F2A37"/>
                 </a:solidFill>
                 <a:latin typeface="Amiri" pitchFamily="2" charset="-78"/>
+                <a:ea typeface="Amiri" pitchFamily="2" charset="-78"/>
                 <a:cs typeface="Amiri" pitchFamily="2" charset="-78"/>
               </a:rPr>
               <a:t>بِآمِنٌ</a:t>
@@ -44306,6 +44523,7 @@
                   <a:srgbClr val="1F2A37"/>
                 </a:solidFill>
                 <a:latin typeface="Amiri" pitchFamily="2" charset="-78"/>
+                <a:ea typeface="Amiri" pitchFamily="2" charset="-78"/>
                 <a:cs typeface="Amiri" pitchFamily="2" charset="-78"/>
               </a:rPr>
               <a:t>فِي الشِّتَاءُ</a:t>
@@ -44407,6 +44625,7 @@
                   <a:srgbClr val="1F2A37"/>
                 </a:solidFill>
                 <a:latin typeface="Amiri" pitchFamily="2" charset="-78"/>
+                <a:ea typeface="Amiri" pitchFamily="2" charset="-78"/>
                 <a:cs typeface="Amiri" pitchFamily="2" charset="-78"/>
               </a:rPr>
               <a:t>فِي الشِّتَاءِ</a:t>
@@ -44508,6 +44727,7 @@
                   <a:srgbClr val="1F2A37"/>
                 </a:solidFill>
                 <a:latin typeface="Amiri" pitchFamily="2" charset="-78"/>
+                <a:ea typeface="Amiri" pitchFamily="2" charset="-78"/>
                 <a:cs typeface="Amiri" pitchFamily="2" charset="-78"/>
               </a:rPr>
               <a:t>بِشِتَاءٌ</a:t>
@@ -44744,6 +44964,7 @@
                   <a:srgbClr val="1F2A37"/>
                 </a:solidFill>
                 <a:latin typeface="Amiri" pitchFamily="2" charset="-78"/>
+                <a:ea typeface="Amiri" pitchFamily="2" charset="-78"/>
                 <a:cs typeface="Amiri" pitchFamily="2" charset="-78"/>
               </a:rPr>
               <a:t>فِي الْمَدْرَسَةِ</a:t>
@@ -44845,6 +45066,7 @@
                   <a:srgbClr val="1F2A37"/>
                 </a:solidFill>
                 <a:latin typeface="Amiri" pitchFamily="2" charset="-78"/>
+                <a:ea typeface="Amiri" pitchFamily="2" charset="-78"/>
                 <a:cs typeface="Amiri" pitchFamily="2" charset="-78"/>
               </a:rPr>
               <a:t>بِسُرْعَةٍ</a:t>
@@ -44946,6 +45168,7 @@
                   <a:srgbClr val="1F2A37"/>
                 </a:solidFill>
                 <a:latin typeface="Amiri" pitchFamily="2" charset="-78"/>
+                <a:ea typeface="Amiri" pitchFamily="2" charset="-78"/>
                 <a:cs typeface="Amiri" pitchFamily="2" charset="-78"/>
               </a:rPr>
               <a:t>هُنَا</a:t>
@@ -45189,6 +45412,7 @@
                   <a:srgbClr val="D4AF37"/>
                 </a:solidFill>
                 <a:latin typeface="Amiri" pitchFamily="2" charset="-78"/>
+                <a:ea typeface="Amiri" pitchFamily="2" charset="-78"/>
                 <a:cs typeface="Amiri" pitchFamily="2" charset="-78"/>
               </a:rPr>
               <a:t>م</a:t>
@@ -45509,6 +45733,7 @@
                   <a:srgbClr val="8A6D1E"/>
                 </a:solidFill>
                 <a:latin typeface="Amiri" pitchFamily="2" charset="-78"/>
+                <a:ea typeface="Amiri" pitchFamily="2" charset="-78"/>
                 <a:cs typeface="Amiri" pitchFamily="2" charset="-78"/>
               </a:rPr>
               <a:t>إِجَابَاتُ تَذْكِرَةِ الخُرُوجِ</a:t>
@@ -45810,6 +46035,7 @@
                   <a:srgbClr val="1F2A37"/>
                 </a:solidFill>
                 <a:latin typeface="Amiri" pitchFamily="2" charset="-78"/>
+                <a:ea typeface="Amiri" pitchFamily="2" charset="-78"/>
                 <a:cs typeface="Amiri" pitchFamily="2" charset="-78"/>
               </a:rPr>
               <a:t>بِأَمَانٍ</a:t>
@@ -45911,6 +46137,7 @@
                   <a:srgbClr val="9AA1AB"/>
                 </a:solidFill>
                 <a:latin typeface="Amiri" pitchFamily="2" charset="-78"/>
+                <a:ea typeface="Amiri" pitchFamily="2" charset="-78"/>
                 <a:cs typeface="Amiri" pitchFamily="2" charset="-78"/>
               </a:rPr>
               <a:t>أَمِينٌ</a:t>
@@ -46012,6 +46239,7 @@
                   <a:srgbClr val="9AA1AB"/>
                 </a:solidFill>
                 <a:latin typeface="Amiri" pitchFamily="2" charset="-78"/>
+                <a:ea typeface="Amiri" pitchFamily="2" charset="-78"/>
                 <a:cs typeface="Amiri" pitchFamily="2" charset="-78"/>
               </a:rPr>
               <a:t>بِآمِنٌ</a:t>
@@ -46286,6 +46514,7 @@
                   <a:srgbClr val="9AA1AB"/>
                 </a:solidFill>
                 <a:latin typeface="Amiri" pitchFamily="2" charset="-78"/>
+                <a:ea typeface="Amiri" pitchFamily="2" charset="-78"/>
                 <a:cs typeface="Amiri" pitchFamily="2" charset="-78"/>
               </a:rPr>
               <a:t>فِي الشِّتَاءُ</a:t>
@@ -46414,6 +46643,7 @@
                   <a:srgbClr val="1F2A37"/>
                 </a:solidFill>
                 <a:latin typeface="Amiri" pitchFamily="2" charset="-78"/>
+                <a:ea typeface="Amiri" pitchFamily="2" charset="-78"/>
                 <a:cs typeface="Amiri" pitchFamily="2" charset="-78"/>
               </a:rPr>
               <a:t>فِي الشِّتَاءِ</a:t>
@@ -46515,6 +46745,7 @@
                   <a:srgbClr val="9AA1AB"/>
                 </a:solidFill>
                 <a:latin typeface="Amiri" pitchFamily="2" charset="-78"/>
+                <a:ea typeface="Amiri" pitchFamily="2" charset="-78"/>
                 <a:cs typeface="Amiri" pitchFamily="2" charset="-78"/>
               </a:rPr>
               <a:t>بِشِتَاءٌ</a:t>
@@ -46816,6 +47047,7 @@
                   <a:srgbClr val="1F2A37"/>
                 </a:solidFill>
                 <a:latin typeface="Amiri" pitchFamily="2" charset="-78"/>
+                <a:ea typeface="Amiri" pitchFamily="2" charset="-78"/>
                 <a:cs typeface="Amiri" pitchFamily="2" charset="-78"/>
               </a:rPr>
               <a:t>فِي الْمَدْرَسَةِ</a:t>
@@ -46917,6 +47149,7 @@
                   <a:srgbClr val="9AA1AB"/>
                 </a:solidFill>
                 <a:latin typeface="Amiri" pitchFamily="2" charset="-78"/>
+                <a:ea typeface="Amiri" pitchFamily="2" charset="-78"/>
                 <a:cs typeface="Amiri" pitchFamily="2" charset="-78"/>
               </a:rPr>
               <a:t>بِسُرْعَةٍ</a:t>
@@ -47018,6 +47251,7 @@
                   <a:srgbClr val="9AA1AB"/>
                 </a:solidFill>
                 <a:latin typeface="Amiri" pitchFamily="2" charset="-78"/>
+                <a:ea typeface="Amiri" pitchFamily="2" charset="-78"/>
                 <a:cs typeface="Amiri" pitchFamily="2" charset="-78"/>
               </a:rPr>
               <a:t>هُنَا</a:t>
@@ -47299,6 +47533,7 @@
                   <a:srgbClr val="D4AF37"/>
                 </a:solidFill>
                 <a:latin typeface="Amiri" pitchFamily="2" charset="-78"/>
+                <a:ea typeface="Amiri" pitchFamily="2" charset="-78"/>
                 <a:cs typeface="Amiri" pitchFamily="2" charset="-78"/>
               </a:rPr>
               <a:t>م</a:t>
@@ -47619,6 +47854,7 @@
                   <a:srgbClr val="8A6D1E"/>
                 </a:solidFill>
                 <a:latin typeface="Amiri" pitchFamily="2" charset="-78"/>
+                <a:ea typeface="Amiri" pitchFamily="2" charset="-78"/>
                 <a:cs typeface="Amiri" pitchFamily="2" charset="-78"/>
               </a:rPr>
               <a:t>التَّحْضِيرُ لِلدَّرْسِ القَادِمِ</a:t>
@@ -47832,6 +48068,7 @@
                   <a:srgbClr val="1B3B6F"/>
                 </a:solidFill>
                 <a:latin typeface="Amiri" pitchFamily="2" charset="-78"/>
+                <a:ea typeface="Amiri" pitchFamily="2" charset="-78"/>
                 <a:cs typeface="Amiri" pitchFamily="2" charset="-78"/>
               </a:rPr>
               <a:t>عَادَةً</a:t>
@@ -47921,6 +48158,7 @@
                   <a:srgbClr val="1B3B6F"/>
                 </a:solidFill>
                 <a:latin typeface="Amiri" pitchFamily="2" charset="-78"/>
+                <a:ea typeface="Amiri" pitchFamily="2" charset="-78"/>
                 <a:cs typeface="Amiri" pitchFamily="2" charset="-78"/>
               </a:rPr>
               <a:t>أَوَّلًا</a:t>
@@ -48010,6 +48248,7 @@
                   <a:srgbClr val="1B3B6F"/>
                 </a:solidFill>
                 <a:latin typeface="Amiri" pitchFamily="2" charset="-78"/>
+                <a:ea typeface="Amiri" pitchFamily="2" charset="-78"/>
                 <a:cs typeface="Amiri" pitchFamily="2" charset="-78"/>
               </a:rPr>
               <a:t>بَعْدَ ذَلِكَ</a:t>
@@ -48099,6 +48338,7 @@
                   <a:srgbClr val="1B3B6F"/>
                 </a:solidFill>
                 <a:latin typeface="Amiri" pitchFamily="2" charset="-78"/>
+                <a:ea typeface="Amiri" pitchFamily="2" charset="-78"/>
                 <a:cs typeface="Amiri" pitchFamily="2" charset="-78"/>
               </a:rPr>
               <a:t>أَخِيرًا</a:t>
@@ -48188,6 +48428,7 @@
                   <a:srgbClr val="1B3B6F"/>
                 </a:solidFill>
                 <a:latin typeface="Amiri" pitchFamily="2" charset="-78"/>
+                <a:ea typeface="Amiri" pitchFamily="2" charset="-78"/>
                 <a:cs typeface="Amiri" pitchFamily="2" charset="-78"/>
               </a:rPr>
               <a:t>فِي الْبِدَايَةِ</a:t>
@@ -48353,6 +48594,7 @@
                   <a:srgbClr val="1B3B6F"/>
                 </a:solidFill>
                 <a:latin typeface="Amiri" pitchFamily="2" charset="-78"/>
+                <a:ea typeface="Amiri" pitchFamily="2" charset="-78"/>
                 <a:cs typeface="Amiri" pitchFamily="2" charset="-78"/>
               </a:rPr>
               <a:t>أَوَّلًا … ثُمَّ … ______</a:t>
@@ -49022,6 +49264,7 @@
                   <a:srgbClr val="FFFFFF"/>
                 </a:solidFill>
                 <a:latin typeface="Amiri" pitchFamily="2" charset="-78"/>
+                <a:ea typeface="Amiri" pitchFamily="2" charset="-78"/>
                 <a:cs typeface="Amiri" pitchFamily="2" charset="-78"/>
               </a:rPr>
               <a:t>أَحْسَنْتُمْ! إِلَى اللِّقَاءِ</a:t>
@@ -49174,6 +49417,7 @@
                   <a:srgbClr val="D4AF37"/>
                 </a:solidFill>
                 <a:latin typeface="Amiri" pitchFamily="2" charset="-78"/>
+                <a:ea typeface="Amiri" pitchFamily="2" charset="-78"/>
                 <a:cs typeface="Amiri" pitchFamily="2" charset="-78"/>
               </a:rPr>
               <a:t>عِبَارَاتٌ ظَرْفِيَّةٌ شَائِعَةٌ لِلطَّلَاقَةِ</a:t>
@@ -49307,6 +49551,7 @@
                   <a:srgbClr val="D4AF37"/>
                 </a:solidFill>
                 <a:latin typeface="Amiri" pitchFamily="2" charset="-78"/>
+                <a:ea typeface="Amiri" pitchFamily="2" charset="-78"/>
                 <a:cs typeface="Amiri" pitchFamily="2" charset="-78"/>
               </a:rPr>
               <a:t>م</a:t>
@@ -49627,6 +49872,7 @@
                   <a:srgbClr val="8A6D1E"/>
                 </a:solidFill>
                 <a:latin typeface="Amiri" pitchFamily="2" charset="-78"/>
+                <a:ea typeface="Amiri" pitchFamily="2" charset="-78"/>
                 <a:cs typeface="Amiri" pitchFamily="2" charset="-78"/>
               </a:rPr>
               <a:t>اِبْدَأِ الآنَ</a:t>
@@ -49901,6 +50147,7 @@
                   <a:srgbClr val="1F2A37"/>
                 </a:solidFill>
                 <a:latin typeface="Amiri" pitchFamily="2" charset="-78"/>
+                <a:ea typeface="Amiri" pitchFamily="2" charset="-78"/>
                 <a:cs typeface="Amiri" pitchFamily="2" charset="-78"/>
               </a:rPr>
               <a:t>سَرِيعٌ</a:t>
@@ -50002,6 +50249,7 @@
                   <a:srgbClr val="1F2A37"/>
                 </a:solidFill>
                 <a:latin typeface="Amiri" pitchFamily="2" charset="-78"/>
+                <a:ea typeface="Amiri" pitchFamily="2" charset="-78"/>
                 <a:cs typeface="Amiri" pitchFamily="2" charset="-78"/>
               </a:rPr>
               <a:t>بِسُرْعَةٍ</a:t>
@@ -50103,6 +50351,7 @@
                   <a:srgbClr val="1F2A37"/>
                 </a:solidFill>
                 <a:latin typeface="Amiri" pitchFamily="2" charset="-78"/>
+                <a:ea typeface="Amiri" pitchFamily="2" charset="-78"/>
                 <a:cs typeface="Amiri" pitchFamily="2" charset="-78"/>
               </a:rPr>
               <a:t>فِي سَرِيعٍ</a:t>
@@ -50339,6 +50588,7 @@
                   <a:srgbClr val="1F2A37"/>
                 </a:solidFill>
                 <a:latin typeface="Amiri" pitchFamily="2" charset="-78"/>
+                <a:ea typeface="Amiri" pitchFamily="2" charset="-78"/>
                 <a:cs typeface="Amiri" pitchFamily="2" charset="-78"/>
               </a:rPr>
               <a:t>بِسُهُولَةٍ</a:t>
@@ -50440,6 +50690,7 @@
                   <a:srgbClr val="1F2A37"/>
                 </a:solidFill>
                 <a:latin typeface="Amiri" pitchFamily="2" charset="-78"/>
+                <a:ea typeface="Amiri" pitchFamily="2" charset="-78"/>
                 <a:cs typeface="Amiri" pitchFamily="2" charset="-78"/>
               </a:rPr>
               <a:t>سَهْلَةٌ</a:t>
@@ -50541,6 +50792,7 @@
                   <a:srgbClr val="1F2A37"/>
                 </a:solidFill>
                 <a:latin typeface="Amiri" pitchFamily="2" charset="-78"/>
+                <a:ea typeface="Amiri" pitchFamily="2" charset="-78"/>
                 <a:cs typeface="Amiri" pitchFamily="2" charset="-78"/>
               </a:rPr>
               <a:t>فِي سَهْلٍ</a:t>
@@ -50714,6 +50966,7 @@
                   <a:srgbClr val="1F2A37"/>
                 </a:solidFill>
                 <a:latin typeface="Amiri" pitchFamily="2" charset="-78"/>
+                <a:ea typeface="Amiri" pitchFamily="2" charset="-78"/>
                 <a:cs typeface="Amiri" pitchFamily="2" charset="-78"/>
               </a:rPr>
               <a:t>أَدْرُسُ ___ الْمَدْرَسَةِ.</a:t>
@@ -50815,6 +51068,7 @@
                   <a:srgbClr val="1F2A37"/>
                 </a:solidFill>
                 <a:latin typeface="Amiri" pitchFamily="2" charset="-78"/>
+                <a:ea typeface="Amiri" pitchFamily="2" charset="-78"/>
                 <a:cs typeface="Amiri" pitchFamily="2" charset="-78"/>
               </a:rPr>
               <a:t>بِسُرْعَةٍ</a:t>
@@ -50916,6 +51170,7 @@
                   <a:srgbClr val="1F2A37"/>
                 </a:solidFill>
                 <a:latin typeface="Amiri" pitchFamily="2" charset="-78"/>
+                <a:ea typeface="Amiri" pitchFamily="2" charset="-78"/>
                 <a:cs typeface="Amiri" pitchFamily="2" charset="-78"/>
               </a:rPr>
               <a:t>هُنَاكَ مِنْ</a:t>
@@ -51017,6 +51272,7 @@
                   <a:srgbClr val="1F2A37"/>
                 </a:solidFill>
                 <a:latin typeface="Amiri" pitchFamily="2" charset="-78"/>
+                <a:ea typeface="Amiri" pitchFamily="2" charset="-78"/>
                 <a:cs typeface="Amiri" pitchFamily="2" charset="-78"/>
               </a:rPr>
               <a:t>فِي</a:t>
@@ -51190,6 +51446,7 @@
                   <a:srgbClr val="1F2A37"/>
                 </a:solidFill>
                 <a:latin typeface="Amiri" pitchFamily="2" charset="-78"/>
+                <a:ea typeface="Amiri" pitchFamily="2" charset="-78"/>
                 <a:cs typeface="Amiri" pitchFamily="2" charset="-78"/>
               </a:rPr>
               <a:t>كَتَبْتُ بِعِنَايَةٌ.</a:t>
@@ -51291,6 +51548,7 @@
                   <a:srgbClr val="1F2A37"/>
                 </a:solidFill>
                 <a:latin typeface="Amiri" pitchFamily="2" charset="-78"/>
+                <a:ea typeface="Amiri" pitchFamily="2" charset="-78"/>
                 <a:cs typeface="Amiri" pitchFamily="2" charset="-78"/>
               </a:rPr>
               <a:t>كَتَبْتُ عِنَايَةٌ.</a:t>
@@ -51392,6 +51650,7 @@
                   <a:srgbClr val="1F2A37"/>
                 </a:solidFill>
                 <a:latin typeface="Amiri" pitchFamily="2" charset="-78"/>
+                <a:ea typeface="Amiri" pitchFamily="2" charset="-78"/>
                 <a:cs typeface="Amiri" pitchFamily="2" charset="-78"/>
               </a:rPr>
               <a:t>كَتَبْتُ بِعِنَايَةَ.</a:t>
@@ -51493,6 +51752,7 @@
                   <a:srgbClr val="1F2A37"/>
                 </a:solidFill>
                 <a:latin typeface="Amiri" pitchFamily="2" charset="-78"/>
+                <a:ea typeface="Amiri" pitchFamily="2" charset="-78"/>
                 <a:cs typeface="Amiri" pitchFamily="2" charset="-78"/>
               </a:rPr>
               <a:t>كَتَبْتُ بِعِنَايَةٍ.</a:t>
@@ -51843,6 +52103,7 @@
                   <a:srgbClr val="1F2A37"/>
                 </a:solidFill>
                 <a:latin typeface="Amiri" pitchFamily="2" charset="-78"/>
+                <a:ea typeface="Amiri" pitchFamily="2" charset="-78"/>
                 <a:cs typeface="Amiri" pitchFamily="2" charset="-78"/>
               </a:rPr>
               <a:t>بِ</a:t>
@@ -51957,6 +52218,7 @@
                   <a:srgbClr val="1F2A37"/>
                 </a:solidFill>
                 <a:latin typeface="Amiri" pitchFamily="2" charset="-78"/>
+                <a:ea typeface="Amiri" pitchFamily="2" charset="-78"/>
                 <a:cs typeface="Amiri" pitchFamily="2" charset="-78"/>
               </a:rPr>
               <a:t>في</a:t>
@@ -52305,6 +52567,7 @@
                   <a:srgbClr val="D4AF37"/>
                 </a:solidFill>
                 <a:latin typeface="Amiri" pitchFamily="2" charset="-78"/>
+                <a:ea typeface="Amiri" pitchFamily="2" charset="-78"/>
                 <a:cs typeface="Amiri" pitchFamily="2" charset="-78"/>
               </a:rPr>
               <a:t>م</a:t>
@@ -52625,6 +52888,7 @@
                   <a:srgbClr val="8A6D1E"/>
                 </a:solidFill>
                 <a:latin typeface="Amiri" pitchFamily="2" charset="-78"/>
+                <a:ea typeface="Amiri" pitchFamily="2" charset="-78"/>
                 <a:cs typeface="Amiri" pitchFamily="2" charset="-78"/>
               </a:rPr>
               <a:t>الإِجَابَاتُ وَالتَّعْلِيلُ</a:t>
@@ -52899,6 +53163,7 @@
                   <a:srgbClr val="9AA1AB"/>
                 </a:solidFill>
                 <a:latin typeface="Amiri" pitchFamily="2" charset="-78"/>
+                <a:ea typeface="Amiri" pitchFamily="2" charset="-78"/>
                 <a:cs typeface="Amiri" pitchFamily="2" charset="-78"/>
               </a:rPr>
               <a:t>سَرِيعٌ</a:t>
@@ -53027,6 +53292,7 @@
                   <a:srgbClr val="1F2A37"/>
                 </a:solidFill>
                 <a:latin typeface="Amiri" pitchFamily="2" charset="-78"/>
+                <a:ea typeface="Amiri" pitchFamily="2" charset="-78"/>
                 <a:cs typeface="Amiri" pitchFamily="2" charset="-78"/>
               </a:rPr>
               <a:t>بِسُرْعَةٍ</a:t>
@@ -53128,6 +53394,7 @@
                   <a:srgbClr val="9AA1AB"/>
                 </a:solidFill>
                 <a:latin typeface="Amiri" pitchFamily="2" charset="-78"/>
+                <a:ea typeface="Amiri" pitchFamily="2" charset="-78"/>
                 <a:cs typeface="Amiri" pitchFamily="2" charset="-78"/>
               </a:rPr>
               <a:t>فِي سَرِيعٍ</a:t>
@@ -53429,6 +53696,7 @@
                   <a:srgbClr val="1F2A37"/>
                 </a:solidFill>
                 <a:latin typeface="Amiri" pitchFamily="2" charset="-78"/>
+                <a:ea typeface="Amiri" pitchFamily="2" charset="-78"/>
                 <a:cs typeface="Amiri" pitchFamily="2" charset="-78"/>
               </a:rPr>
               <a:t>بِسُهُولَةٍ</a:t>
@@ -53530,6 +53798,7 @@
                   <a:srgbClr val="9AA1AB"/>
                 </a:solidFill>
                 <a:latin typeface="Amiri" pitchFamily="2" charset="-78"/>
+                <a:ea typeface="Amiri" pitchFamily="2" charset="-78"/>
                 <a:cs typeface="Amiri" pitchFamily="2" charset="-78"/>
               </a:rPr>
               <a:t>سَهْلَةٌ</a:t>
@@ -53631,6 +53900,7 @@
                   <a:srgbClr val="9AA1AB"/>
                 </a:solidFill>
                 <a:latin typeface="Amiri" pitchFamily="2" charset="-78"/>
+                <a:ea typeface="Amiri" pitchFamily="2" charset="-78"/>
                 <a:cs typeface="Amiri" pitchFamily="2" charset="-78"/>
               </a:rPr>
               <a:t>فِي سَهْلٍ</a:t>
@@ -53842,6 +54112,7 @@
                   <a:srgbClr val="1F2A37"/>
                 </a:solidFill>
                 <a:latin typeface="Amiri" pitchFamily="2" charset="-78"/>
+                <a:ea typeface="Amiri" pitchFamily="2" charset="-78"/>
                 <a:cs typeface="Amiri" pitchFamily="2" charset="-78"/>
               </a:rPr>
               <a:t>أَدْرُسُ ___ الْمَدْرَسَةِ.</a:t>
@@ -53943,6 +54214,7 @@
                   <a:srgbClr val="9AA1AB"/>
                 </a:solidFill>
                 <a:latin typeface="Amiri" pitchFamily="2" charset="-78"/>
+                <a:ea typeface="Amiri" pitchFamily="2" charset="-78"/>
                 <a:cs typeface="Amiri" pitchFamily="2" charset="-78"/>
               </a:rPr>
               <a:t>بِسُرْعَةٍ</a:t>
@@ -54044,6 +54316,7 @@
                   <a:srgbClr val="9AA1AB"/>
                 </a:solidFill>
                 <a:latin typeface="Amiri" pitchFamily="2" charset="-78"/>
+                <a:ea typeface="Amiri" pitchFamily="2" charset="-78"/>
                 <a:cs typeface="Amiri" pitchFamily="2" charset="-78"/>
               </a:rPr>
               <a:t>هُنَاكَ مِنْ</a:t>
@@ -54172,6 +54445,7 @@
                   <a:srgbClr val="1F2A37"/>
                 </a:solidFill>
                 <a:latin typeface="Amiri" pitchFamily="2" charset="-78"/>
+                <a:ea typeface="Amiri" pitchFamily="2" charset="-78"/>
                 <a:cs typeface="Amiri" pitchFamily="2" charset="-78"/>
               </a:rPr>
               <a:t>فِي</a:t>
@@ -54383,6 +54657,7 @@
                   <a:srgbClr val="1F2A37"/>
                 </a:solidFill>
                 <a:latin typeface="Amiri" pitchFamily="2" charset="-78"/>
+                <a:ea typeface="Amiri" pitchFamily="2" charset="-78"/>
                 <a:cs typeface="Amiri" pitchFamily="2" charset="-78"/>
               </a:rPr>
               <a:t>كَتَبْتُ بِعِنَايَةٌ.</a:t>
@@ -54484,6 +54759,7 @@
                   <a:srgbClr val="9AA1AB"/>
                 </a:solidFill>
                 <a:latin typeface="Amiri" pitchFamily="2" charset="-78"/>
+                <a:ea typeface="Amiri" pitchFamily="2" charset="-78"/>
                 <a:cs typeface="Amiri" pitchFamily="2" charset="-78"/>
               </a:rPr>
               <a:t>كَتَبْتُ عِنَايَةٌ.</a:t>
@@ -54585,6 +54861,7 @@
                   <a:srgbClr val="9AA1AB"/>
                 </a:solidFill>
                 <a:latin typeface="Amiri" pitchFamily="2" charset="-78"/>
+                <a:ea typeface="Amiri" pitchFamily="2" charset="-78"/>
                 <a:cs typeface="Amiri" pitchFamily="2" charset="-78"/>
               </a:rPr>
               <a:t>كَتَبْتُ بِعِنَايَةَ.</a:t>
@@ -54713,6 +54990,7 @@
                   <a:srgbClr val="1F2A37"/>
                 </a:solidFill>
                 <a:latin typeface="Amiri" pitchFamily="2" charset="-78"/>
+                <a:ea typeface="Amiri" pitchFamily="2" charset="-78"/>
                 <a:cs typeface="Amiri" pitchFamily="2" charset="-78"/>
               </a:rPr>
               <a:t>كَتَبْتُ بِعِنَايَةٍ.</a:t>
@@ -55128,6 +55406,7 @@
                   <a:srgbClr val="9AA1AB"/>
                 </a:solidFill>
                 <a:latin typeface="Amiri" pitchFamily="2" charset="-78"/>
+                <a:ea typeface="Amiri" pitchFamily="2" charset="-78"/>
                 <a:cs typeface="Amiri" pitchFamily="2" charset="-78"/>
               </a:rPr>
               <a:t>بِ</a:t>
@@ -55242,6 +55521,7 @@
                   <a:srgbClr val="9AA1AB"/>
                 </a:solidFill>
                 <a:latin typeface="Amiri" pitchFamily="2" charset="-78"/>
+                <a:ea typeface="Amiri" pitchFamily="2" charset="-78"/>
                 <a:cs typeface="Amiri" pitchFamily="2" charset="-78"/>
               </a:rPr>
               <a:t>في</a:t>
@@ -55441,6 +55721,7 @@
                   <a:srgbClr val="0E7C86"/>
                 </a:solidFill>
                 <a:latin typeface="Amiri" pitchFamily="2" charset="-78"/>
+                <a:ea typeface="Amiri" pitchFamily="2" charset="-78"/>
                 <a:cs typeface="Amiri" pitchFamily="2" charset="-78"/>
               </a:rPr>
               <a:t>بِ</a:t>
@@ -55454,6 +55735,7 @@
                   <a:srgbClr val="D6336C"/>
                 </a:solidFill>
                 <a:latin typeface="Amiri" pitchFamily="2" charset="-78"/>
+                <a:ea typeface="Amiri" pitchFamily="2" charset="-78"/>
                 <a:cs typeface="Amiri" pitchFamily="2" charset="-78"/>
               </a:rPr>
               <a:t>سُرْعَةٍ</a:t>
@@ -55480,6 +55762,7 @@
                   <a:srgbClr val="0E7C86"/>
                 </a:solidFill>
                 <a:latin typeface="Amiri" pitchFamily="2" charset="-78"/>
+                <a:ea typeface="Amiri" pitchFamily="2" charset="-78"/>
                 <a:cs typeface="Amiri" pitchFamily="2" charset="-78"/>
               </a:rPr>
               <a:t>فِي</a:t>
@@ -55506,6 +55789,7 @@
                   <a:srgbClr val="D6336C"/>
                 </a:solidFill>
                 <a:latin typeface="Amiri" pitchFamily="2" charset="-78"/>
+                <a:ea typeface="Amiri" pitchFamily="2" charset="-78"/>
                 <a:cs typeface="Amiri" pitchFamily="2" charset="-78"/>
               </a:rPr>
               <a:t>الصَّبَاحِ</a:t>
@@ -55639,6 +55923,7 @@
                   <a:srgbClr val="D4AF37"/>
                 </a:solidFill>
                 <a:latin typeface="Amiri" pitchFamily="2" charset="-78"/>
+                <a:ea typeface="Amiri" pitchFamily="2" charset="-78"/>
                 <a:cs typeface="Amiri" pitchFamily="2" charset="-78"/>
               </a:rPr>
               <a:t>م</a:t>
@@ -55959,6 +56244,7 @@
                   <a:srgbClr val="8A6D1E"/>
                 </a:solidFill>
                 <a:latin typeface="Amiri" pitchFamily="2" charset="-78"/>
+                <a:ea typeface="Amiri" pitchFamily="2" charset="-78"/>
                 <a:cs typeface="Amiri" pitchFamily="2" charset="-78"/>
               </a:rPr>
               <a:t>الأَهْدَافُ وَمَعَايِيرُ النَّجَاحِ</a:t>
@@ -56107,6 +56393,7 @@
                   <a:srgbClr val="8A6D1E"/>
                 </a:solidFill>
                 <a:latin typeface="Amiri" pitchFamily="2" charset="-78"/>
+                <a:ea typeface="Amiri" pitchFamily="2" charset="-78"/>
                 <a:cs typeface="Amiri" pitchFamily="2" charset="-78"/>
               </a:rPr>
               <a:t>سَتَتَعَلَّمُ اليَوْمَ</a:t>
@@ -57262,6 +57549,7 @@
                   <a:srgbClr val="D4AF37"/>
                 </a:solidFill>
                 <a:latin typeface="Amiri" pitchFamily="2" charset="-78"/>
+                <a:ea typeface="Amiri" pitchFamily="2" charset="-78"/>
                 <a:cs typeface="Amiri" pitchFamily="2" charset="-78"/>
               </a:rPr>
               <a:t>م</a:t>
@@ -57582,6 +57870,7 @@
                   <a:srgbClr val="8A6D1E"/>
                 </a:solidFill>
                 <a:latin typeface="Amiri" pitchFamily="2" charset="-78"/>
+                <a:ea typeface="Amiri" pitchFamily="2" charset="-78"/>
                 <a:cs typeface="Amiri" pitchFamily="2" charset="-78"/>
               </a:rPr>
               <a:t>مُصْطَلَحَاتُ الدَّرْسِ</a:t>
@@ -57820,6 +58109,7 @@
                   <a:srgbClr val="1B3B6F"/>
                 </a:solidFill>
                 <a:latin typeface="Amiri" pitchFamily="2" charset="-78"/>
+                <a:ea typeface="Amiri" pitchFamily="2" charset="-78"/>
                 <a:cs typeface="Amiri" pitchFamily="2" charset="-78"/>
               </a:rPr>
               <a:t>حَرْفُ الْجَرِّ</a:t>
@@ -57912,6 +58202,7 @@
                   <a:srgbClr val="8A6D1E"/>
                 </a:solidFill>
                 <a:latin typeface="Amiri" pitchFamily="2" charset="-78"/>
+                <a:ea typeface="Amiri" pitchFamily="2" charset="-78"/>
                 <a:cs typeface="Amiri" pitchFamily="2" charset="-78"/>
               </a:rPr>
               <a:t>بِـ · فِي</a:t>
@@ -58112,6 +58403,7 @@
                   <a:srgbClr val="1B3B6F"/>
                 </a:solidFill>
                 <a:latin typeface="Amiri" pitchFamily="2" charset="-78"/>
+                <a:ea typeface="Amiri" pitchFamily="2" charset="-78"/>
                 <a:cs typeface="Amiri" pitchFamily="2" charset="-78"/>
               </a:rPr>
               <a:t>الْمَجْرُورُ</a:t>
@@ -58204,6 +58496,7 @@
                   <a:srgbClr val="8A6D1E"/>
                 </a:solidFill>
                 <a:latin typeface="Amiri" pitchFamily="2" charset="-78"/>
+                <a:ea typeface="Amiri" pitchFamily="2" charset="-78"/>
                 <a:cs typeface="Amiri" pitchFamily="2" charset="-78"/>
               </a:rPr>
               <a:t>بِسُرْعَةٍ</a:t>
@@ -58404,6 +58697,7 @@
                   <a:srgbClr val="1B3B6F"/>
                 </a:solidFill>
                 <a:latin typeface="Amiri" pitchFamily="2" charset="-78"/>
+                <a:ea typeface="Amiri" pitchFamily="2" charset="-78"/>
                 <a:cs typeface="Amiri" pitchFamily="2" charset="-78"/>
               </a:rPr>
               <a:t>بِـ</a:t>
@@ -58496,6 +58790,7 @@
                   <a:srgbClr val="8A6D1E"/>
                 </a:solidFill>
                 <a:latin typeface="Amiri" pitchFamily="2" charset="-78"/>
+                <a:ea typeface="Amiri" pitchFamily="2" charset="-78"/>
                 <a:cs typeface="Amiri" pitchFamily="2" charset="-78"/>
               </a:rPr>
               <a:t>بِعِنَايَةٍ · بِالْحَافِلَةِ</a:t>
@@ -58696,6 +58991,7 @@
                   <a:srgbClr val="1B3B6F"/>
                 </a:solidFill>
                 <a:latin typeface="Amiri" pitchFamily="2" charset="-78"/>
+                <a:ea typeface="Amiri" pitchFamily="2" charset="-78"/>
                 <a:cs typeface="Amiri" pitchFamily="2" charset="-78"/>
               </a:rPr>
               <a:t>فِي</a:t>
@@ -58788,6 +59084,7 @@
                   <a:srgbClr val="8A6D1E"/>
                 </a:solidFill>
                 <a:latin typeface="Amiri" pitchFamily="2" charset="-78"/>
+                <a:ea typeface="Amiri" pitchFamily="2" charset="-78"/>
                 <a:cs typeface="Amiri" pitchFamily="2" charset="-78"/>
               </a:rPr>
               <a:t>فِي الْمَدْرَسَةِ</a:t>
@@ -58988,6 +59285,7 @@
                   <a:srgbClr val="1B3B6F"/>
                 </a:solidFill>
                 <a:latin typeface="Amiri" pitchFamily="2" charset="-78"/>
+                <a:ea typeface="Amiri" pitchFamily="2" charset="-78"/>
                 <a:cs typeface="Amiri" pitchFamily="2" charset="-78"/>
               </a:rPr>
               <a:t>سُرْعَةٌ</a:t>
@@ -59080,6 +59378,7 @@
                   <a:srgbClr val="8A6D1E"/>
                 </a:solidFill>
                 <a:latin typeface="Amiri" pitchFamily="2" charset="-78"/>
+                <a:ea typeface="Amiri" pitchFamily="2" charset="-78"/>
                 <a:cs typeface="Amiri" pitchFamily="2" charset="-78"/>
               </a:rPr>
               <a:t>بِسُرْعَةٍ</a:t>
@@ -59293,6 +59592,7 @@
                   <a:srgbClr val="1B3B6F"/>
                 </a:solidFill>
                 <a:latin typeface="Amiri" pitchFamily="2" charset="-78"/>
+                <a:ea typeface="Amiri" pitchFamily="2" charset="-78"/>
                 <a:cs typeface="Amiri" pitchFamily="2" charset="-78"/>
               </a:rPr>
               <a:t>الْوَسِيلَةُ</a:t>
@@ -59385,6 +59685,7 @@
                   <a:srgbClr val="8A6D1E"/>
                 </a:solidFill>
                 <a:latin typeface="Amiri" pitchFamily="2" charset="-78"/>
+                <a:ea typeface="Amiri" pitchFamily="2" charset="-78"/>
                 <a:cs typeface="Amiri" pitchFamily="2" charset="-78"/>
               </a:rPr>
               <a:t>بِالسَّيَّارَةِ</a:t>
@@ -59518,6 +59819,7 @@
                   <a:srgbClr val="D4AF37"/>
                 </a:solidFill>
                 <a:latin typeface="Amiri" pitchFamily="2" charset="-78"/>
+                <a:ea typeface="Amiri" pitchFamily="2" charset="-78"/>
                 <a:cs typeface="Amiri" pitchFamily="2" charset="-78"/>
               </a:rPr>
               <a:t>م</a:t>
@@ -59838,6 +60140,7 @@
                   <a:srgbClr val="8A6D1E"/>
                 </a:solidFill>
                 <a:latin typeface="Amiri" pitchFamily="2" charset="-78"/>
+                <a:ea typeface="Amiri" pitchFamily="2" charset="-78"/>
                 <a:cs typeface="Amiri" pitchFamily="2" charset="-78"/>
               </a:rPr>
               <a:t>بِـ + اسْمٍ</a:t>
@@ -60080,6 +60383,7 @@
                   <a:srgbClr val="1B3B6F"/>
                 </a:solidFill>
                 <a:latin typeface="Amiri" pitchFamily="2" charset="-78"/>
+                <a:ea typeface="Amiri" pitchFamily="2" charset="-78"/>
                 <a:cs typeface="Amiri" pitchFamily="2" charset="-78"/>
               </a:rPr>
               <a:t>أَكْمَلْتُ الْعَمَلَ بِسُرْعَةٍ.</a:t>
@@ -60156,6 +60460,7 @@
                   <a:srgbClr val="1B3B6F"/>
                 </a:solidFill>
                 <a:latin typeface="Amiri" pitchFamily="2" charset="-78"/>
+                <a:ea typeface="Amiri" pitchFamily="2" charset="-78"/>
                 <a:cs typeface="Amiri" pitchFamily="2" charset="-78"/>
               </a:rPr>
               <a:t>بِسُرْعَةٍ</a:t>
@@ -60286,6 +60591,7 @@
                   <a:srgbClr val="1B3B6F"/>
                 </a:solidFill>
                 <a:latin typeface="Amiri" pitchFamily="2" charset="-78"/>
+                <a:ea typeface="Amiri" pitchFamily="2" charset="-78"/>
                 <a:cs typeface="Amiri" pitchFamily="2" charset="-78"/>
               </a:rPr>
               <a:t>تَحَدَّثَ بِبُطْءٍ.</a:t>
@@ -60362,6 +60668,7 @@
                   <a:srgbClr val="1B3B6F"/>
                 </a:solidFill>
                 <a:latin typeface="Amiri" pitchFamily="2" charset="-78"/>
+                <a:ea typeface="Amiri" pitchFamily="2" charset="-78"/>
                 <a:cs typeface="Amiri" pitchFamily="2" charset="-78"/>
               </a:rPr>
               <a:t>بِبُطْءٍ</a:t>
@@ -60492,6 +60799,7 @@
                   <a:srgbClr val="1B3B6F"/>
                 </a:solidFill>
                 <a:latin typeface="Amiri" pitchFamily="2" charset="-78"/>
+                <a:ea typeface="Amiri" pitchFamily="2" charset="-78"/>
                 <a:cs typeface="Amiri" pitchFamily="2" charset="-78"/>
               </a:rPr>
               <a:t>فَهِمْتُ الدَّرْسَ بِسُهُولَةٍ.</a:t>
@@ -60568,6 +60876,7 @@
                   <a:srgbClr val="1B3B6F"/>
                 </a:solidFill>
                 <a:latin typeface="Amiri" pitchFamily="2" charset="-78"/>
+                <a:ea typeface="Amiri" pitchFamily="2" charset="-78"/>
                 <a:cs typeface="Amiri" pitchFamily="2" charset="-78"/>
               </a:rPr>
               <a:t>بِسُهُولَةٍ</a:t>
@@ -60698,6 +61007,7 @@
                   <a:srgbClr val="1B3B6F"/>
                 </a:solidFill>
                 <a:latin typeface="Amiri" pitchFamily="2" charset="-78"/>
+                <a:ea typeface="Amiri" pitchFamily="2" charset="-78"/>
                 <a:cs typeface="Amiri" pitchFamily="2" charset="-78"/>
               </a:rPr>
               <a:t>وَجَدْنَا الْمَكَانَ بِصُعُوبَةٍ.</a:t>
@@ -60774,6 +61084,7 @@
                   <a:srgbClr val="1B3B6F"/>
                 </a:solidFill>
                 <a:latin typeface="Amiri" pitchFamily="2" charset="-78"/>
+                <a:ea typeface="Amiri" pitchFamily="2" charset="-78"/>
                 <a:cs typeface="Amiri" pitchFamily="2" charset="-78"/>
               </a:rPr>
               <a:t>بِصُعُوبَةٍ</a:t>
@@ -60904,6 +61215,7 @@
                   <a:srgbClr val="1B3B6F"/>
                 </a:solidFill>
                 <a:latin typeface="Amiri" pitchFamily="2" charset="-78"/>
+                <a:ea typeface="Amiri" pitchFamily="2" charset="-78"/>
                 <a:cs typeface="Amiri" pitchFamily="2" charset="-78"/>
               </a:rPr>
               <a:t>أَجَابَتْ بِهُدُوءٍ وَبِوُضُوحٍ.</a:t>
@@ -60980,6 +61292,7 @@
                   <a:srgbClr val="1B3B6F"/>
                 </a:solidFill>
                 <a:latin typeface="Amiri" pitchFamily="2" charset="-78"/>
+                <a:ea typeface="Amiri" pitchFamily="2" charset="-78"/>
                 <a:cs typeface="Amiri" pitchFamily="2" charset="-78"/>
               </a:rPr>
               <a:t>بِهُدُوءٍ · بِوُضُوحٍ</a:t>
@@ -61045,6 +61358,7 @@
                   <a:srgbClr val="1B3B6F"/>
                 </a:solidFill>
                 <a:latin typeface="Amiri" pitchFamily="2" charset="-78"/>
+                <a:ea typeface="Amiri" pitchFamily="2" charset="-78"/>
                 <a:cs typeface="Amiri" pitchFamily="2" charset="-78"/>
               </a:rPr>
               <a:t>قُدْ بِعِنَايَةٍ وَبِأَمَانٍ.</a:t>
@@ -61121,6 +61435,7 @@
                   <a:srgbClr val="1B3B6F"/>
                 </a:solidFill>
                 <a:latin typeface="Amiri" pitchFamily="2" charset="-78"/>
+                <a:ea typeface="Amiri" pitchFamily="2" charset="-78"/>
                 <a:cs typeface="Amiri" pitchFamily="2" charset="-78"/>
               </a:rPr>
               <a:t>بِعِنَايَةٍ · بِأَمَانٍ</a:t>
@@ -61292,6 +61607,7 @@
                   <a:srgbClr val="D4AF37"/>
                 </a:solidFill>
                 <a:latin typeface="Amiri" pitchFamily="2" charset="-78"/>
+                <a:ea typeface="Amiri" pitchFamily="2" charset="-78"/>
                 <a:cs typeface="Amiri" pitchFamily="2" charset="-78"/>
               </a:rPr>
               <a:t>م</a:t>
@@ -61612,6 +61928,7 @@
                   <a:srgbClr val="8A6D1E"/>
                 </a:solidFill>
                 <a:latin typeface="Amiri" pitchFamily="2" charset="-78"/>
+                <a:ea typeface="Amiri" pitchFamily="2" charset="-78"/>
                 <a:cs typeface="Amiri" pitchFamily="2" charset="-78"/>
               </a:rPr>
               <a:t>مِنَ الصِّفَةِ إِلَى الْعِبَارَةِ</a:t>
@@ -61930,6 +62247,7 @@
                   <a:srgbClr val="1B3B6F"/>
                 </a:solidFill>
                 <a:latin typeface="Amiri" pitchFamily="2" charset="-78"/>
+                <a:ea typeface="Amiri" pitchFamily="2" charset="-78"/>
                 <a:cs typeface="Amiri" pitchFamily="2" charset="-78"/>
               </a:rPr>
               <a:t>بِسُرْعَةٍ</a:t>
@@ -61968,6 +62286,7 @@
                   <a:srgbClr val="1B3B6F"/>
                 </a:solidFill>
                 <a:latin typeface="Amiri" pitchFamily="2" charset="-78"/>
+                <a:ea typeface="Amiri" pitchFamily="2" charset="-78"/>
                 <a:cs typeface="Amiri" pitchFamily="2" charset="-78"/>
               </a:rPr>
               <a:t>سُرْعَةٌ</a:t>
@@ -62006,6 +62325,7 @@
                   <a:srgbClr val="1B3B6F"/>
                 </a:solidFill>
                 <a:latin typeface="Amiri" pitchFamily="2" charset="-78"/>
+                <a:ea typeface="Amiri" pitchFamily="2" charset="-78"/>
                 <a:cs typeface="Amiri" pitchFamily="2" charset="-78"/>
               </a:rPr>
               <a:t>سَرِيعٌ</a:t>
@@ -62174,6 +62494,7 @@
                   <a:srgbClr val="1B3B6F"/>
                 </a:solidFill>
                 <a:latin typeface="Amiri" pitchFamily="2" charset="-78"/>
+                <a:ea typeface="Amiri" pitchFamily="2" charset="-78"/>
                 <a:cs typeface="Amiri" pitchFamily="2" charset="-78"/>
               </a:rPr>
               <a:t>بِسُهُولَةٍ</a:t>
@@ -62212,6 +62533,7 @@
                   <a:srgbClr val="1B3B6F"/>
                 </a:solidFill>
                 <a:latin typeface="Amiri" pitchFamily="2" charset="-78"/>
+                <a:ea typeface="Amiri" pitchFamily="2" charset="-78"/>
                 <a:cs typeface="Amiri" pitchFamily="2" charset="-78"/>
               </a:rPr>
               <a:t>سُهُولَةٌ</a:t>
@@ -62250,6 +62572,7 @@
                   <a:srgbClr val="1B3B6F"/>
                 </a:solidFill>
                 <a:latin typeface="Amiri" pitchFamily="2" charset="-78"/>
+                <a:ea typeface="Amiri" pitchFamily="2" charset="-78"/>
                 <a:cs typeface="Amiri" pitchFamily="2" charset="-78"/>
               </a:rPr>
               <a:t>سَهْلٌ</a:t>
@@ -62418,6 +62741,7 @@
                   <a:srgbClr val="1B3B6F"/>
                 </a:solidFill>
                 <a:latin typeface="Amiri" pitchFamily="2" charset="-78"/>
+                <a:ea typeface="Amiri" pitchFamily="2" charset="-78"/>
                 <a:cs typeface="Amiri" pitchFamily="2" charset="-78"/>
               </a:rPr>
               <a:t>بِوُضُوحٍ</a:t>
@@ -62456,6 +62780,7 @@
                   <a:srgbClr val="1B3B6F"/>
                 </a:solidFill>
                 <a:latin typeface="Amiri" pitchFamily="2" charset="-78"/>
+                <a:ea typeface="Amiri" pitchFamily="2" charset="-78"/>
                 <a:cs typeface="Amiri" pitchFamily="2" charset="-78"/>
               </a:rPr>
               <a:t>وُضُوحٌ</a:t>
@@ -62494,6 +62819,7 @@
                   <a:srgbClr val="1B3B6F"/>
                 </a:solidFill>
                 <a:latin typeface="Amiri" pitchFamily="2" charset="-78"/>
+                <a:ea typeface="Amiri" pitchFamily="2" charset="-78"/>
                 <a:cs typeface="Amiri" pitchFamily="2" charset="-78"/>
               </a:rPr>
               <a:t>وَاضِحٌ</a:t>
@@ -62662,6 +62988,7 @@
                   <a:srgbClr val="1B3B6F"/>
                 </a:solidFill>
                 <a:latin typeface="Amiri" pitchFamily="2" charset="-78"/>
+                <a:ea typeface="Amiri" pitchFamily="2" charset="-78"/>
                 <a:cs typeface="Amiri" pitchFamily="2" charset="-78"/>
               </a:rPr>
               <a:t>بِهُدُوءٍ</a:t>
@@ -62700,6 +63027,7 @@
                   <a:srgbClr val="1B3B6F"/>
                 </a:solidFill>
                 <a:latin typeface="Amiri" pitchFamily="2" charset="-78"/>
+                <a:ea typeface="Amiri" pitchFamily="2" charset="-78"/>
                 <a:cs typeface="Amiri" pitchFamily="2" charset="-78"/>
               </a:rPr>
               <a:t>هُدُوءٌ</a:t>
@@ -62738,6 +63066,7 @@
                   <a:srgbClr val="1B3B6F"/>
                 </a:solidFill>
                 <a:latin typeface="Amiri" pitchFamily="2" charset="-78"/>
+                <a:ea typeface="Amiri" pitchFamily="2" charset="-78"/>
                 <a:cs typeface="Amiri" pitchFamily="2" charset="-78"/>
               </a:rPr>
               <a:t>هَادِئٌ</a:t>
@@ -62841,6 +63170,7 @@
                   <a:srgbClr val="1B3B6F"/>
                 </a:solidFill>
                 <a:latin typeface="Amiri" pitchFamily="2" charset="-78"/>
+                <a:ea typeface="Amiri" pitchFamily="2" charset="-78"/>
                 <a:cs typeface="Amiri" pitchFamily="2" charset="-78"/>
               </a:rPr>
               <a:t>بِأَمَانٍ</a:t>
@@ -62879,6 +63209,7 @@
                   <a:srgbClr val="1B3B6F"/>
                 </a:solidFill>
                 <a:latin typeface="Amiri" pitchFamily="2" charset="-78"/>
+                <a:ea typeface="Amiri" pitchFamily="2" charset="-78"/>
                 <a:cs typeface="Amiri" pitchFamily="2" charset="-78"/>
               </a:rPr>
               <a:t>أَمَانٌ</a:t>
@@ -62917,6 +63248,7 @@
                   <a:srgbClr val="1B3B6F"/>
                 </a:solidFill>
                 <a:latin typeface="Amiri" pitchFamily="2" charset="-78"/>
+                <a:ea typeface="Amiri" pitchFamily="2" charset="-78"/>
                 <a:cs typeface="Amiri" pitchFamily="2" charset="-78"/>
               </a:rPr>
               <a:t>آمِنٌ</a:t>
@@ -63053,13 +63385,9 @@
     <a:fontScheme name="Office">
       <a:majorFont>
         <a:latin typeface="Calibri Light" panose="020F0302020204030204"/>
-        <a:ea typeface=""/>
-        <a:cs typeface=""/>
-        <a:font script="Jpan" typeface="游ゴシック Light"/>
-        <a:font script="Hang" typeface="맑은 고딕"/>
-        <a:font script="Hans" typeface="等线 Light"/>
-        <a:font script="Hant" typeface="新細明體"/>
-        <a:font script="Arab" typeface="Times New Roman"/>
+        <a:ea typeface="Amiri" pitchFamily="2" charset="-78"/>
+        <a:cs typeface="Amiri" pitchFamily="2" charset="-78"/>
+        <a:font script="Arab" typeface="Amiri"/>
         <a:font script="Hebr" typeface="Times New Roman"/>
         <a:font script="Thai" typeface="Angsana New"/>
         <a:font script="Ethi" typeface="Nyala"/>
@@ -63105,13 +63433,9 @@
       </a:majorFont>
       <a:minorFont>
         <a:latin typeface="Calibri" panose="020F0502020204030204"/>
-        <a:ea typeface=""/>
-        <a:cs typeface=""/>
-        <a:font script="Jpan" typeface="游ゴシック"/>
-        <a:font script="Hang" typeface="맑은 고딕"/>
-        <a:font script="Hans" typeface="等线"/>
-        <a:font script="Hant" typeface="新細明體"/>
-        <a:font script="Arab" typeface="Arial"/>
+        <a:ea typeface="Amiri" pitchFamily="2" charset="-78"/>
+        <a:cs typeface="Amiri" pitchFamily="2" charset="-78"/>
+        <a:font script="Arab" typeface="Amiri"/>
         <a:font script="Hebr" typeface="Arial"/>
         <a:font script="Thai" typeface="Cordia New"/>
         <a:font script="Ethi" typeface="Nyala"/>
